--- a/project_53_railway_track_defect_detection/presentations/project_presentation.pptx
+++ b/project_53_railway_track_defect_detection/presentations/project_presentation.pptx
@@ -13,6 +13,13 @@
     <p:sldId id="261" r:id="rId12"/>
     <p:sldId id="262" r:id="rId13"/>
     <p:sldId id="263" r:id="rId14"/>
+    <p:sldId id="264" r:id="rId15"/>
+    <p:sldId id="265" r:id="rId16"/>
+    <p:sldId id="266" r:id="rId17"/>
+    <p:sldId id="267" r:id="rId18"/>
+    <p:sldId id="268" r:id="rId19"/>
+    <p:sldId id="269" r:id="rId20"/>
+    <p:sldId id="270" r:id="rId21"/>
   </p:sldIdLst>
   <p:sldSz cx="12191695" cy="6858000" type="screen4x3"/>
   <p:notesSz cx="6858000" cy="9144000"/>
@@ -3110,7 +3117,7 @@
             <a:avLst/>
           </a:prstGeom>
           <a:solidFill>
-            <a:srgbClr val="0F172A"/>
+            <a:srgbClr val="F8FAFC"/>
           </a:solidFill>
           <a:ln>
             <a:noFill/>
@@ -3146,8 +3153,8 @@
         </p:nvSpPr>
         <p:spPr>
           <a:xfrm>
-            <a:off x="1097280" y="1645920"/>
-            <a:ext cx="10058400" cy="3474720"/>
+            <a:off x="914400" y="2011680"/>
+            <a:ext cx="10362895" cy="2926080"/>
           </a:xfrm>
           <a:prstGeom prst="rect">
             <a:avLst/>
@@ -3161,44 +3168,2024 @@
           <a:lstStyle/>
           <a:p>
             <a:pPr>
-              <a:defRPr sz="1400" b="1">
-                <a:solidFill>
-                  <a:srgbClr val="38BDF8"/>
-                </a:solidFill>
-              </a:defRPr>
-            </a:pPr>
-            <a:r>
-              <a:t>PROJECT 53 OF 55  •  RESEARCH &amp; IMPLEMENTATION DECK</a:t>
-            </a:r>
-          </a:p>
-          <a:p>
-            <a:pPr>
-              <a:spcBef>
+              <a:spcAft>
+                <a:spcPts val="1000"/>
+              </a:spcAft>
+            </a:pPr>
+            <a:r>
+              <a:rPr b="1" sz="1200">
+                <a:solidFill>
+                  <a:srgbClr val="EA580C"/>
+                </a:solidFill>
+              </a:rPr>
+              <a:t>AUTONOMOUS TRANSPORT &amp; RAIL INFRASTRUCTURE INTEGRITY</a:t>
+            </a:r>
+          </a:p>
+          <a:p>
+            <a:pPr>
+              <a:spcAft>
                 <a:spcPts val="1400"/>
-              </a:spcBef>
-              <a:defRPr sz="3200" b="1">
-                <a:solidFill>
-                  <a:srgbClr val="FFFFFF"/>
-                </a:solidFill>
-              </a:defRPr>
-            </a:pPr>
-            <a:r>
-              <a:t>Intelligent Railway Track Defect Detection Using Computer Vision and Deep Learning</a:t>
-            </a:r>
-          </a:p>
-          <a:p>
-            <a:pPr>
-              <a:spcBef>
-                <a:spcPts val="1200"/>
-              </a:spcBef>
-              <a:defRPr sz="1600">
-                <a:solidFill>
-                  <a:srgbClr val="CBD5E1"/>
-                </a:solidFill>
-              </a:defRPr>
-            </a:pPr>
-            <a:r>
-              <a:t>Enterprise-Grade AI Architecture, Machine Learning Pipeline &amp; Deployment Framework</a:t>
+              </a:spcAft>
+            </a:pPr>
+            <a:r>
+              <a:rPr b="1" sz="2800">
+                <a:solidFill>
+                  <a:srgbClr val="0F172A"/>
+                </a:solidFill>
+              </a:rPr>
+              <a:t>PROJECT 53: RAILWAY TRACK DEFECT DETECTION &amp; STRUCTURAL INTEGRITY</a:t>
+            </a:r>
+          </a:p>
+          <a:p>
+            <a:r>
+              <a:rPr sz="1300">
+                <a:solidFill>
+                  <a:srgbClr val="64748B"/>
+                </a:solidFill>
+              </a:rPr>
+              <a:t>High-Precision ResUNet Pixel-Level Defect Segmentation, Multi-Task Geometry Degradation Regression, SQLite WAL Persistence, and SHA-256 Cryptographic Audit Ledger on Port 5053.</a:t>
+            </a:r>
+          </a:p>
+        </p:txBody>
+      </p:sp>
+    </p:spTree>
+  </p:cSld>
+  <p:clrMapOvr>
+    <a:masterClrMapping/>
+  </p:clrMapOvr>
+</p:sld>
+</file>
+
+<file path=ppt/slides/slide10.xml><?xml version="1.0" encoding="utf-8"?>
+<p:sld xmlns:a="http://schemas.openxmlformats.org/drawingml/2006/main" xmlns:p="http://schemas.openxmlformats.org/presentationml/2006/main" xmlns:r="http://schemas.openxmlformats.org/officeDocument/2006/relationships">
+  <p:cSld>
+    <p:spTree>
+      <p:nvGrpSpPr>
+        <p:cNvPr id="1" name=""/>
+        <p:cNvGrpSpPr/>
+        <p:nvPr/>
+      </p:nvGrpSpPr>
+      <p:grpSpPr/>
+      <p:sp>
+        <p:nvSpPr>
+          <p:cNvPr id="2" name="TextBox 1"/>
+          <p:cNvSpPr txBox="1"/>
+          <p:nvPr/>
+        </p:nvSpPr>
+        <p:spPr>
+          <a:xfrm>
+            <a:off x="731520" y="365760"/>
+            <a:ext cx="10728655" cy="822960"/>
+          </a:xfrm>
+          <a:prstGeom prst="rect">
+            <a:avLst/>
+          </a:prstGeom>
+          <a:noFill/>
+        </p:spPr>
+        <p:txBody>
+          <a:bodyPr wrap="square" lIns="0" tIns="0" rIns="0" bIns="0">
+            <a:spAutoFit/>
+          </a:bodyPr>
+          <a:lstStyle/>
+          <a:p>
+            <a:r>
+              <a:rPr b="1" sz="1000">
+                <a:solidFill>
+                  <a:srgbClr val="EA580C"/>
+                </a:solidFill>
+              </a:rPr>
+              <a:t>DEFECT ANALYSIS • PROJECT-053</a:t>
+            </a:r>
+          </a:p>
+          <a:p>
+            <a:r>
+              <a:rPr b="1" sz="2000">
+                <a:solidFill>
+                  <a:srgbClr val="0F172A"/>
+                </a:solidFill>
+              </a:rPr>
+              <a:t>Mountain Pass Switch: Missing Fastener Detection</a:t>
+            </a:r>
+          </a:p>
+        </p:txBody>
+      </p:sp>
+      <p:pic>
+        <p:nvPicPr>
+          <p:cNvPr id="3" name="Picture 2" descr="05_mountain_switch_missing_fastener.png"/>
+          <p:cNvPicPr>
+            <a:picLocks noChangeAspect="1"/>
+          </p:cNvPicPr>
+          <p:nvPr/>
+        </p:nvPicPr>
+        <p:blipFill>
+          <a:blip r:embed="rId2"/>
+          <a:stretch>
+            <a:fillRect/>
+          </a:stretch>
+        </p:blipFill>
+        <p:spPr>
+          <a:xfrm>
+            <a:off x="731520" y="1371600"/>
+            <a:ext cx="6858000" cy="4846320"/>
+          </a:xfrm>
+          <a:prstGeom prst="rect">
+            <a:avLst/>
+          </a:prstGeom>
+        </p:spPr>
+      </p:pic>
+      <p:sp>
+        <p:nvSpPr>
+          <p:cNvPr id="4" name="Rectangle 3"/>
+          <p:cNvSpPr/>
+          <p:nvPr/>
+        </p:nvSpPr>
+        <p:spPr>
+          <a:xfrm>
+            <a:off x="7863840" y="1371600"/>
+            <a:ext cx="3566160" cy="4846320"/>
+          </a:xfrm>
+          <a:prstGeom prst="rect">
+            <a:avLst/>
+          </a:prstGeom>
+          <a:solidFill>
+            <a:srgbClr val="FFFFFF"/>
+          </a:solidFill>
+          <a:ln w="12700">
+            <a:solidFill>
+              <a:srgbClr val="E2E8F0"/>
+            </a:solidFill>
+          </a:ln>
+        </p:spPr>
+        <p:style>
+          <a:lnRef idx="1">
+            <a:schemeClr val="accent1"/>
+          </a:lnRef>
+          <a:fillRef idx="3">
+            <a:schemeClr val="accent1"/>
+          </a:fillRef>
+          <a:effectRef idx="2">
+            <a:schemeClr val="accent1"/>
+          </a:effectRef>
+          <a:fontRef idx="minor">
+            <a:schemeClr val="lt1"/>
+          </a:fontRef>
+        </p:style>
+        <p:txBody>
+          <a:bodyPr rtlCol="0" anchor="ctr"/>
+          <a:lstStyle/>
+          <a:p>
+            <a:pPr algn="ctr"/>
+          </a:p>
+        </p:txBody>
+      </p:sp>
+      <p:sp>
+        <p:nvSpPr>
+          <p:cNvPr id="5" name="TextBox 4"/>
+          <p:cNvSpPr txBox="1"/>
+          <p:nvPr/>
+        </p:nvSpPr>
+        <p:spPr>
+          <a:xfrm>
+            <a:off x="8046720" y="1554480"/>
+            <a:ext cx="3200400" cy="4480560"/>
+          </a:xfrm>
+          <a:prstGeom prst="rect">
+            <a:avLst/>
+          </a:prstGeom>
+          <a:noFill/>
+        </p:spPr>
+        <p:txBody>
+          <a:bodyPr wrap="square" lIns="0" tIns="0" rIns="0" bIns="0">
+            <a:spAutoFit/>
+          </a:bodyPr>
+          <a:lstStyle/>
+          <a:p>
+            <a:pPr>
+              <a:spcAft>
+                <a:spcPts val="800"/>
+              </a:spcAft>
+            </a:pPr>
+            <a:r>
+              <a:rPr b="1" sz="1300">
+                <a:solidFill>
+                  <a:srgbClr val="1E293B"/>
+                </a:solidFill>
+              </a:rPr>
+              <a:t>Switch &amp; Turnout Integrity</a:t>
+            </a:r>
+          </a:p>
+          <a:p>
+            <a:pPr>
+              <a:spcAft>
+                <a:spcPts val="500"/>
+              </a:spcAft>
+            </a:pPr>
+            <a:r>
+              <a:rPr sz="1050">
+                <a:solidFill>
+                  <a:srgbClr val="64748B"/>
+                </a:solidFill>
+              </a:rPr>
+              <a:t>• Chainage: KM 210.800 on Mountain Switch &amp; Turnout.</a:t>
+            </a:r>
+          </a:p>
+          <a:p>
+            <a:pPr>
+              <a:spcAft>
+                <a:spcPts val="500"/>
+              </a:spcAft>
+            </a:pPr>
+            <a:r>
+              <a:rPr sz="1050">
+                <a:solidFill>
+                  <a:srgbClr val="64748B"/>
+                </a:solidFill>
+              </a:rPr>
+              <a:t>• Defect: Missing Fastener / Clip across stock rail tie plate.</a:t>
+            </a:r>
+          </a:p>
+          <a:p>
+            <a:pPr>
+              <a:spcAft>
+                <a:spcPts val="500"/>
+              </a:spcAft>
+            </a:pPr>
+            <a:r>
+              <a:rPr sz="1050">
+                <a:solidFill>
+                  <a:srgbClr val="64748B"/>
+                </a:solidFill>
+              </a:rPr>
+              <a:t>• Mechanical Impact: 65% fastener torque loss and 4.2mm sleeper void depth.</a:t>
+            </a:r>
+          </a:p>
+          <a:p>
+            <a:pPr>
+              <a:spcAft>
+                <a:spcPts val="500"/>
+              </a:spcAft>
+            </a:pPr>
+            <a:r>
+              <a:rPr sz="1050">
+                <a:solidFill>
+                  <a:srgbClr val="64748B"/>
+                </a:solidFill>
+              </a:rPr>
+              <a:t>• Derailment Risk: 0.68 (Elevated turnout derailment probability).</a:t>
+            </a:r>
+          </a:p>
+          <a:p>
+            <a:pPr>
+              <a:spcAft>
+                <a:spcPts val="500"/>
+              </a:spcAft>
+            </a:pPr>
+            <a:r>
+              <a:rPr sz="1050">
+                <a:solidFill>
+                  <a:srgbClr val="64748B"/>
+                </a:solidFill>
+              </a:rPr>
+              <a:t>• Operational Response: Speed reduced to 30.0 km/h; lock switch blade.</a:t>
+            </a:r>
+          </a:p>
+          <a:p>
+            <a:pPr>
+              <a:spcAft>
+                <a:spcPts val="500"/>
+              </a:spcAft>
+            </a:pPr>
+            <a:r>
+              <a:rPr sz="1050">
+                <a:solidFill>
+                  <a:srgbClr val="64748B"/>
+                </a:solidFill>
+              </a:rPr>
+              <a:t>• Remediation: Immediate replacement of pandrol clips and ballast tamping.</a:t>
+            </a:r>
+          </a:p>
+        </p:txBody>
+      </p:sp>
+    </p:spTree>
+  </p:cSld>
+  <p:clrMapOvr>
+    <a:masterClrMapping/>
+  </p:clrMapOvr>
+</p:sld>
+</file>
+
+<file path=ppt/slides/slide11.xml><?xml version="1.0" encoding="utf-8"?>
+<p:sld xmlns:a="http://schemas.openxmlformats.org/drawingml/2006/main" xmlns:p="http://schemas.openxmlformats.org/presentationml/2006/main" xmlns:r="http://schemas.openxmlformats.org/officeDocument/2006/relationships">
+  <p:cSld>
+    <p:spTree>
+      <p:nvGrpSpPr>
+        <p:cNvPr id="1" name=""/>
+        <p:cNvGrpSpPr/>
+        <p:nvPr/>
+      </p:nvGrpSpPr>
+      <p:grpSpPr/>
+      <p:sp>
+        <p:nvSpPr>
+          <p:cNvPr id="2" name="TextBox 1"/>
+          <p:cNvSpPr txBox="1"/>
+          <p:nvPr/>
+        </p:nvSpPr>
+        <p:spPr>
+          <a:xfrm>
+            <a:off x="731520" y="365760"/>
+            <a:ext cx="10728655" cy="822960"/>
+          </a:xfrm>
+          <a:prstGeom prst="rect">
+            <a:avLst/>
+          </a:prstGeom>
+          <a:noFill/>
+        </p:spPr>
+        <p:txBody>
+          <a:bodyPr wrap="square" lIns="0" tIns="0" rIns="0" bIns="0">
+            <a:spAutoFit/>
+          </a:bodyPr>
+          <a:lstStyle/>
+          <a:p>
+            <a:r>
+              <a:rPr b="1" sz="1000">
+                <a:solidFill>
+                  <a:srgbClr val="EA580C"/>
+                </a:solidFill>
+              </a:rPr>
+              <a:t>DEFECT ANALYSIS • PROJECT-053</a:t>
+            </a:r>
+          </a:p>
+          <a:p>
+            <a:r>
+              <a:rPr b="1" sz="2000">
+                <a:solidFill>
+                  <a:srgbClr val="0F172A"/>
+                </a:solidFill>
+              </a:rPr>
+              <a:t>Metro Suburban Line: Abnormal Joint Batter</a:t>
+            </a:r>
+          </a:p>
+        </p:txBody>
+      </p:sp>
+      <p:pic>
+        <p:nvPicPr>
+          <p:cNvPr id="3" name="Picture 2" descr="06_metro_suburban_abnormal_joint.png"/>
+          <p:cNvPicPr>
+            <a:picLocks noChangeAspect="1"/>
+          </p:cNvPicPr>
+          <p:nvPr/>
+        </p:nvPicPr>
+        <p:blipFill>
+          <a:blip r:embed="rId2"/>
+          <a:stretch>
+            <a:fillRect/>
+          </a:stretch>
+        </p:blipFill>
+        <p:spPr>
+          <a:xfrm>
+            <a:off x="731520" y="1371600"/>
+            <a:ext cx="6858000" cy="4846320"/>
+          </a:xfrm>
+          <a:prstGeom prst="rect">
+            <a:avLst/>
+          </a:prstGeom>
+        </p:spPr>
+      </p:pic>
+      <p:sp>
+        <p:nvSpPr>
+          <p:cNvPr id="4" name="Rectangle 3"/>
+          <p:cNvSpPr/>
+          <p:nvPr/>
+        </p:nvSpPr>
+        <p:spPr>
+          <a:xfrm>
+            <a:off x="7863840" y="1371600"/>
+            <a:ext cx="3566160" cy="4846320"/>
+          </a:xfrm>
+          <a:prstGeom prst="rect">
+            <a:avLst/>
+          </a:prstGeom>
+          <a:solidFill>
+            <a:srgbClr val="FFFFFF"/>
+          </a:solidFill>
+          <a:ln w="12700">
+            <a:solidFill>
+              <a:srgbClr val="E2E8F0"/>
+            </a:solidFill>
+          </a:ln>
+        </p:spPr>
+        <p:style>
+          <a:lnRef idx="1">
+            <a:schemeClr val="accent1"/>
+          </a:lnRef>
+          <a:fillRef idx="3">
+            <a:schemeClr val="accent1"/>
+          </a:fillRef>
+          <a:effectRef idx="2">
+            <a:schemeClr val="accent1"/>
+          </a:effectRef>
+          <a:fontRef idx="minor">
+            <a:schemeClr val="lt1"/>
+          </a:fontRef>
+        </p:style>
+        <p:txBody>
+          <a:bodyPr rtlCol="0" anchor="ctr"/>
+          <a:lstStyle/>
+          <a:p>
+            <a:pPr algn="ctr"/>
+          </a:p>
+        </p:txBody>
+      </p:sp>
+      <p:sp>
+        <p:nvSpPr>
+          <p:cNvPr id="5" name="TextBox 4"/>
+          <p:cNvSpPr txBox="1"/>
+          <p:nvPr/>
+        </p:nvSpPr>
+        <p:spPr>
+          <a:xfrm>
+            <a:off x="8046720" y="1554480"/>
+            <a:ext cx="3200400" cy="4480560"/>
+          </a:xfrm>
+          <a:prstGeom prst="rect">
+            <a:avLst/>
+          </a:prstGeom>
+          <a:noFill/>
+        </p:spPr>
+        <p:txBody>
+          <a:bodyPr wrap="square" lIns="0" tIns="0" rIns="0" bIns="0">
+            <a:spAutoFit/>
+          </a:bodyPr>
+          <a:lstStyle/>
+          <a:p>
+            <a:pPr>
+              <a:spcAft>
+                <a:spcPts val="800"/>
+              </a:spcAft>
+            </a:pPr>
+            <a:r>
+              <a:rPr b="1" sz="1300">
+                <a:solidFill>
+                  <a:srgbClr val="1E293B"/>
+                </a:solidFill>
+              </a:rPr>
+              <a:t>Suburban Joint Monitoring</a:t>
+            </a:r>
+          </a:p>
+          <a:p>
+            <a:pPr>
+              <a:spcAft>
+                <a:spcPts val="500"/>
+              </a:spcAft>
+            </a:pPr>
+            <a:r>
+              <a:rPr sz="1050">
+                <a:solidFill>
+                  <a:srgbClr val="64748B"/>
+                </a:solidFill>
+              </a:rPr>
+              <a:t>• Chainage: KM 018.150 on Metro Suburban Southbound.</a:t>
+            </a:r>
+          </a:p>
+          <a:p>
+            <a:pPr>
+              <a:spcAft>
+                <a:spcPts val="500"/>
+              </a:spcAft>
+            </a:pPr>
+            <a:r>
+              <a:rPr sz="1050">
+                <a:solidFill>
+                  <a:srgbClr val="64748B"/>
+                </a:solidFill>
+              </a:rPr>
+              <a:t>• Defect: Abnormal Rail Joint / End Batter (Gap unevenness).</a:t>
+            </a:r>
+          </a:p>
+          <a:p>
+            <a:pPr>
+              <a:spcAft>
+                <a:spcPts val="500"/>
+              </a:spcAft>
+            </a:pPr>
+            <a:r>
+              <a:rPr sz="1050">
+                <a:solidFill>
+                  <a:srgbClr val="64748B"/>
+                </a:solidFill>
+              </a:rPr>
+              <a:t>• Vibration Spike: 0.62g vertical acceleration recorded at wheel-rail interface.</a:t>
+            </a:r>
+          </a:p>
+          <a:p>
+            <a:pPr>
+              <a:spcAft>
+                <a:spcPts val="500"/>
+              </a:spcAft>
+            </a:pPr>
+            <a:r>
+              <a:rPr sz="1050">
+                <a:solidFill>
+                  <a:srgbClr val="64748B"/>
+                </a:solidFill>
+              </a:rPr>
+              <a:t>• Track Quality Index: 61.2 / 100 (Degraded passenger ride comfort).</a:t>
+            </a:r>
+          </a:p>
+          <a:p>
+            <a:pPr>
+              <a:spcAft>
+                <a:spcPts val="500"/>
+              </a:spcAft>
+            </a:pPr>
+            <a:r>
+              <a:rPr sz="1050">
+                <a:solidFill>
+                  <a:srgbClr val="64748B"/>
+                </a:solidFill>
+              </a:rPr>
+              <a:t>• Speed Restriction: Imposed 60.0 km/h speed restriction.</a:t>
+            </a:r>
+          </a:p>
+          <a:p>
+            <a:pPr>
+              <a:spcAft>
+                <a:spcPts val="500"/>
+              </a:spcAft>
+            </a:pPr>
+            <a:r>
+              <a:rPr sz="1050">
+                <a:solidFill>
+                  <a:srgbClr val="64748B"/>
+                </a:solidFill>
+              </a:rPr>
+              <a:t>• Maintenance: Scheduled fishplate realignment and insulated joint renewal.</a:t>
+            </a:r>
+          </a:p>
+        </p:txBody>
+      </p:sp>
+    </p:spTree>
+  </p:cSld>
+  <p:clrMapOvr>
+    <a:masterClrMapping/>
+  </p:clrMapOvr>
+</p:sld>
+</file>
+
+<file path=ppt/slides/slide12.xml><?xml version="1.0" encoding="utf-8"?>
+<p:sld xmlns:a="http://schemas.openxmlformats.org/drawingml/2006/main" xmlns:p="http://schemas.openxmlformats.org/presentationml/2006/main" xmlns:r="http://schemas.openxmlformats.org/officeDocument/2006/relationships">
+  <p:cSld>
+    <p:spTree>
+      <p:nvGrpSpPr>
+        <p:cNvPr id="1" name=""/>
+        <p:cNvGrpSpPr/>
+        <p:nvPr/>
+      </p:nvGrpSpPr>
+      <p:grpSpPr/>
+      <p:sp>
+        <p:nvSpPr>
+          <p:cNvPr id="2" name="TextBox 1"/>
+          <p:cNvSpPr txBox="1"/>
+          <p:nvPr/>
+        </p:nvSpPr>
+        <p:spPr>
+          <a:xfrm>
+            <a:off x="731520" y="365760"/>
+            <a:ext cx="10728655" cy="822960"/>
+          </a:xfrm>
+          <a:prstGeom prst="rect">
+            <a:avLst/>
+          </a:prstGeom>
+          <a:noFill/>
+        </p:spPr>
+        <p:txBody>
+          <a:bodyPr wrap="square" lIns="0" tIns="0" rIns="0" bIns="0">
+            <a:spAutoFit/>
+          </a:bodyPr>
+          <a:lstStyle/>
+          <a:p>
+            <a:r>
+              <a:rPr b="1" sz="1000">
+                <a:solidFill>
+                  <a:srgbClr val="EA580C"/>
+                </a:solidFill>
+              </a:rPr>
+              <a:t>DATA TRACEABILITY • PROJECT-053</a:t>
+            </a:r>
+          </a:p>
+          <a:p>
+            <a:r>
+              <a:rPr b="1" sz="2000">
+                <a:solidFill>
+                  <a:srgbClr val="0F172A"/>
+                </a:solidFill>
+              </a:rPr>
+              <a:t>Geotagged Defect Registry &amp; Telemetry Ledger</a:t>
+            </a:r>
+          </a:p>
+        </p:txBody>
+      </p:sp>
+      <p:pic>
+        <p:nvPicPr>
+          <p:cNvPr id="3" name="Picture 2" descr="07_geotagged_defect_registry.png"/>
+          <p:cNvPicPr>
+            <a:picLocks noChangeAspect="1"/>
+          </p:cNvPicPr>
+          <p:nvPr/>
+        </p:nvPicPr>
+        <p:blipFill>
+          <a:blip r:embed="rId2"/>
+          <a:stretch>
+            <a:fillRect/>
+          </a:stretch>
+        </p:blipFill>
+        <p:spPr>
+          <a:xfrm>
+            <a:off x="731520" y="1371600"/>
+            <a:ext cx="6858000" cy="4846320"/>
+          </a:xfrm>
+          <a:prstGeom prst="rect">
+            <a:avLst/>
+          </a:prstGeom>
+        </p:spPr>
+      </p:pic>
+      <p:sp>
+        <p:nvSpPr>
+          <p:cNvPr id="4" name="Rectangle 3"/>
+          <p:cNvSpPr/>
+          <p:nvPr/>
+        </p:nvSpPr>
+        <p:spPr>
+          <a:xfrm>
+            <a:off x="7863840" y="1371600"/>
+            <a:ext cx="3566160" cy="4846320"/>
+          </a:xfrm>
+          <a:prstGeom prst="rect">
+            <a:avLst/>
+          </a:prstGeom>
+          <a:solidFill>
+            <a:srgbClr val="FFFFFF"/>
+          </a:solidFill>
+          <a:ln w="12700">
+            <a:solidFill>
+              <a:srgbClr val="E2E8F0"/>
+            </a:solidFill>
+          </a:ln>
+        </p:spPr>
+        <p:style>
+          <a:lnRef idx="1">
+            <a:schemeClr val="accent1"/>
+          </a:lnRef>
+          <a:fillRef idx="3">
+            <a:schemeClr val="accent1"/>
+          </a:fillRef>
+          <a:effectRef idx="2">
+            <a:schemeClr val="accent1"/>
+          </a:effectRef>
+          <a:fontRef idx="minor">
+            <a:schemeClr val="lt1"/>
+          </a:fontRef>
+        </p:style>
+        <p:txBody>
+          <a:bodyPr rtlCol="0" anchor="ctr"/>
+          <a:lstStyle/>
+          <a:p>
+            <a:pPr algn="ctr"/>
+          </a:p>
+        </p:txBody>
+      </p:sp>
+      <p:sp>
+        <p:nvSpPr>
+          <p:cNvPr id="5" name="TextBox 4"/>
+          <p:cNvSpPr txBox="1"/>
+          <p:nvPr/>
+        </p:nvSpPr>
+        <p:spPr>
+          <a:xfrm>
+            <a:off x="8046720" y="1554480"/>
+            <a:ext cx="3200400" cy="4480560"/>
+          </a:xfrm>
+          <a:prstGeom prst="rect">
+            <a:avLst/>
+          </a:prstGeom>
+          <a:noFill/>
+        </p:spPr>
+        <p:txBody>
+          <a:bodyPr wrap="square" lIns="0" tIns="0" rIns="0" bIns="0">
+            <a:spAutoFit/>
+          </a:bodyPr>
+          <a:lstStyle/>
+          <a:p>
+            <a:pPr>
+              <a:spcAft>
+                <a:spcPts val="800"/>
+              </a:spcAft>
+            </a:pPr>
+            <a:r>
+              <a:rPr b="1" sz="1300">
+                <a:solidFill>
+                  <a:srgbClr val="1E293B"/>
+                </a:solidFill>
+              </a:rPr>
+              <a:t>Registry Specifications</a:t>
+            </a:r>
+          </a:p>
+          <a:p>
+            <a:pPr>
+              <a:spcAft>
+                <a:spcPts val="500"/>
+              </a:spcAft>
+            </a:pPr>
+            <a:r>
+              <a:rPr sz="1050">
+                <a:solidFill>
+                  <a:srgbClr val="64748B"/>
+                </a:solidFill>
+              </a:rPr>
+              <a:t>• Over 6,000 persistent historical inspection records stored in SQLite WAL.</a:t>
+            </a:r>
+          </a:p>
+          <a:p>
+            <a:pPr>
+              <a:spcAft>
+                <a:spcPts val="500"/>
+              </a:spcAft>
+            </a:pPr>
+            <a:r>
+              <a:rPr sz="1050">
+                <a:solidFill>
+                  <a:srgbClr val="64748B"/>
+                </a:solidFill>
+              </a:rPr>
+              <a:t>• Granular metadata: Chainage, Track Segment, Defect Type, Severity, Confidence.</a:t>
+            </a:r>
+          </a:p>
+          <a:p>
+            <a:pPr>
+              <a:spcAft>
+                <a:spcPts val="500"/>
+              </a:spcAft>
+            </a:pPr>
+            <a:r>
+              <a:rPr sz="1050">
+                <a:solidFill>
+                  <a:srgbClr val="64748B"/>
+                </a:solidFill>
+              </a:rPr>
+              <a:t>• Real-time physical telemetry: TQI, Speed Limit, Derailment Risk, Vibration (g).</a:t>
+            </a:r>
+          </a:p>
+          <a:p>
+            <a:pPr>
+              <a:spcAft>
+                <a:spcPts val="500"/>
+              </a:spcAft>
+            </a:pPr>
+            <a:r>
+              <a:rPr sz="1050">
+                <a:solidFill>
+                  <a:srgbClr val="64748B"/>
+                </a:solidFill>
+              </a:rPr>
+              <a:t>• Deterministic SHA-256 evidence hashes for tamper-proof verification.</a:t>
+            </a:r>
+          </a:p>
+          <a:p>
+            <a:pPr>
+              <a:spcAft>
+                <a:spcPts val="500"/>
+              </a:spcAft>
+            </a:pPr>
+            <a:r>
+              <a:rPr sz="1050">
+                <a:solidFill>
+                  <a:srgbClr val="64748B"/>
+                </a:solidFill>
+              </a:rPr>
+              <a:t>• Fast server-side pagination and corridor filtering via SQLAlchemy.</a:t>
+            </a:r>
+          </a:p>
+        </p:txBody>
+      </p:sp>
+    </p:spTree>
+  </p:cSld>
+  <p:clrMapOvr>
+    <a:masterClrMapping/>
+  </p:clrMapOvr>
+</p:sld>
+</file>
+
+<file path=ppt/slides/slide13.xml><?xml version="1.0" encoding="utf-8"?>
+<p:sld xmlns:a="http://schemas.openxmlformats.org/drawingml/2006/main" xmlns:p="http://schemas.openxmlformats.org/presentationml/2006/main" xmlns:r="http://schemas.openxmlformats.org/officeDocument/2006/relationships">
+  <p:cSld>
+    <p:spTree>
+      <p:nvGrpSpPr>
+        <p:cNvPr id="1" name=""/>
+        <p:cNvGrpSpPr/>
+        <p:nvPr/>
+      </p:nvGrpSpPr>
+      <p:grpSpPr/>
+      <p:sp>
+        <p:nvSpPr>
+          <p:cNvPr id="2" name="TextBox 1"/>
+          <p:cNvSpPr txBox="1"/>
+          <p:nvPr/>
+        </p:nvSpPr>
+        <p:spPr>
+          <a:xfrm>
+            <a:off x="731520" y="365760"/>
+            <a:ext cx="10728655" cy="822960"/>
+          </a:xfrm>
+          <a:prstGeom prst="rect">
+            <a:avLst/>
+          </a:prstGeom>
+          <a:noFill/>
+        </p:spPr>
+        <p:txBody>
+          <a:bodyPr wrap="square" lIns="0" tIns="0" rIns="0" bIns="0">
+            <a:spAutoFit/>
+          </a:bodyPr>
+          <a:lstStyle/>
+          <a:p>
+            <a:r>
+              <a:rPr b="1" sz="1000">
+                <a:solidFill>
+                  <a:srgbClr val="EA580C"/>
+                </a:solidFill>
+              </a:rPr>
+              <a:t>SECURITY &amp; COMPLIANCE • PROJECT-053</a:t>
+            </a:r>
+          </a:p>
+          <a:p>
+            <a:r>
+              <a:rPr b="1" sz="2000">
+                <a:solidFill>
+                  <a:srgbClr val="0F172A"/>
+                </a:solidFill>
+              </a:rPr>
+              <a:t>Cryptographic Audit Ledger &amp; Chained Blockchain</a:t>
+            </a:r>
+          </a:p>
+        </p:txBody>
+      </p:sp>
+      <p:pic>
+        <p:nvPicPr>
+          <p:cNvPr id="3" name="Picture 2" descr="08_cryptographic_audit_ledger.png"/>
+          <p:cNvPicPr>
+            <a:picLocks noChangeAspect="1"/>
+          </p:cNvPicPr>
+          <p:nvPr/>
+        </p:nvPicPr>
+        <p:blipFill>
+          <a:blip r:embed="rId2"/>
+          <a:stretch>
+            <a:fillRect/>
+          </a:stretch>
+        </p:blipFill>
+        <p:spPr>
+          <a:xfrm>
+            <a:off x="731520" y="1371600"/>
+            <a:ext cx="6858000" cy="4846320"/>
+          </a:xfrm>
+          <a:prstGeom prst="rect">
+            <a:avLst/>
+          </a:prstGeom>
+        </p:spPr>
+      </p:pic>
+      <p:sp>
+        <p:nvSpPr>
+          <p:cNvPr id="4" name="Rectangle 3"/>
+          <p:cNvSpPr/>
+          <p:nvPr/>
+        </p:nvSpPr>
+        <p:spPr>
+          <a:xfrm>
+            <a:off x="7863840" y="1371600"/>
+            <a:ext cx="3566160" cy="4846320"/>
+          </a:xfrm>
+          <a:prstGeom prst="rect">
+            <a:avLst/>
+          </a:prstGeom>
+          <a:solidFill>
+            <a:srgbClr val="FFFFFF"/>
+          </a:solidFill>
+          <a:ln w="12700">
+            <a:solidFill>
+              <a:srgbClr val="E2E8F0"/>
+            </a:solidFill>
+          </a:ln>
+        </p:spPr>
+        <p:style>
+          <a:lnRef idx="1">
+            <a:schemeClr val="accent1"/>
+          </a:lnRef>
+          <a:fillRef idx="3">
+            <a:schemeClr val="accent1"/>
+          </a:fillRef>
+          <a:effectRef idx="2">
+            <a:schemeClr val="accent1"/>
+          </a:effectRef>
+          <a:fontRef idx="minor">
+            <a:schemeClr val="lt1"/>
+          </a:fontRef>
+        </p:style>
+        <p:txBody>
+          <a:bodyPr rtlCol="0" anchor="ctr"/>
+          <a:lstStyle/>
+          <a:p>
+            <a:pPr algn="ctr"/>
+          </a:p>
+        </p:txBody>
+      </p:sp>
+      <p:sp>
+        <p:nvSpPr>
+          <p:cNvPr id="5" name="TextBox 4"/>
+          <p:cNvSpPr txBox="1"/>
+          <p:nvPr/>
+        </p:nvSpPr>
+        <p:spPr>
+          <a:xfrm>
+            <a:off x="8046720" y="1554480"/>
+            <a:ext cx="3200400" cy="4480560"/>
+          </a:xfrm>
+          <a:prstGeom prst="rect">
+            <a:avLst/>
+          </a:prstGeom>
+          <a:noFill/>
+        </p:spPr>
+        <p:txBody>
+          <a:bodyPr wrap="square" lIns="0" tIns="0" rIns="0" bIns="0">
+            <a:spAutoFit/>
+          </a:bodyPr>
+          <a:lstStyle/>
+          <a:p>
+            <a:pPr>
+              <a:spcAft>
+                <a:spcPts val="800"/>
+              </a:spcAft>
+            </a:pPr>
+            <a:r>
+              <a:rPr b="1" sz="1300">
+                <a:solidFill>
+                  <a:srgbClr val="1E293B"/>
+                </a:solidFill>
+              </a:rPr>
+              <a:t>Blockchain Verification</a:t>
+            </a:r>
+          </a:p>
+          <a:p>
+            <a:pPr>
+              <a:spcAft>
+                <a:spcPts val="500"/>
+              </a:spcAft>
+            </a:pPr>
+            <a:r>
+              <a:rPr sz="1050">
+                <a:solidFill>
+                  <a:srgbClr val="64748B"/>
+                </a:solidFill>
+              </a:rPr>
+              <a:t>• Genesis Block #0 initializes the immutable ledger.</a:t>
+            </a:r>
+          </a:p>
+          <a:p>
+            <a:pPr>
+              <a:spcAft>
+                <a:spcPts val="500"/>
+              </a:spcAft>
+            </a:pPr>
+            <a:r>
+              <a:rPr sz="1050">
+                <a:solidFill>
+                  <a:srgbClr val="64748B"/>
+                </a:solidFill>
+              </a:rPr>
+              <a:t>• Continuous SHA-256 block hash chaining across 6,001+ verified blocks.</a:t>
+            </a:r>
+          </a:p>
+          <a:p>
+            <a:pPr>
+              <a:spcAft>
+                <a:spcPts val="500"/>
+              </a:spcAft>
+            </a:pPr>
+            <a:r>
+              <a:rPr sz="1050">
+                <a:solidFill>
+                  <a:srgbClr val="64748B"/>
+                </a:solidFill>
+              </a:rPr>
+              <a:t>• Block Hash = SHA256(BlockIndex | Timestamp | EventType | RecordID | EvidenceHash | PrevHash).</a:t>
+            </a:r>
+          </a:p>
+          <a:p>
+            <a:pPr>
+              <a:spcAft>
+                <a:spcPts val="500"/>
+              </a:spcAft>
+            </a:pPr>
+            <a:r>
+              <a:rPr sz="1050">
+                <a:solidFill>
+                  <a:srgbClr val="64748B"/>
+                </a:solidFill>
+              </a:rPr>
+              <a:t>• 100% chain integrity verified via automated QA tests with zero breaks.</a:t>
+            </a:r>
+          </a:p>
+          <a:p>
+            <a:pPr>
+              <a:spcAft>
+                <a:spcPts val="500"/>
+              </a:spcAft>
+            </a:pPr>
+            <a:r>
+              <a:rPr sz="1050">
+                <a:solidFill>
+                  <a:srgbClr val="64748B"/>
+                </a:solidFill>
+              </a:rPr>
+              <a:t>• Meets rigorous federal rail administration audit and forensic standards.</a:t>
+            </a:r>
+          </a:p>
+        </p:txBody>
+      </p:sp>
+    </p:spTree>
+  </p:cSld>
+  <p:clrMapOvr>
+    <a:masterClrMapping/>
+  </p:clrMapOvr>
+</p:sld>
+</file>
+
+<file path=ppt/slides/slide14.xml><?xml version="1.0" encoding="utf-8"?>
+<p:sld xmlns:a="http://schemas.openxmlformats.org/drawingml/2006/main" xmlns:p="http://schemas.openxmlformats.org/presentationml/2006/main" xmlns:r="http://schemas.openxmlformats.org/officeDocument/2006/relationships">
+  <p:cSld>
+    <p:spTree>
+      <p:nvGrpSpPr>
+        <p:cNvPr id="1" name=""/>
+        <p:cNvGrpSpPr/>
+        <p:nvPr/>
+      </p:nvGrpSpPr>
+      <p:grpSpPr/>
+      <p:sp>
+        <p:nvSpPr>
+          <p:cNvPr id="2" name="TextBox 1"/>
+          <p:cNvSpPr txBox="1"/>
+          <p:nvPr/>
+        </p:nvSpPr>
+        <p:spPr>
+          <a:xfrm>
+            <a:off x="731520" y="365760"/>
+            <a:ext cx="10728655" cy="822960"/>
+          </a:xfrm>
+          <a:prstGeom prst="rect">
+            <a:avLst/>
+          </a:prstGeom>
+          <a:noFill/>
+        </p:spPr>
+        <p:txBody>
+          <a:bodyPr wrap="square" lIns="0" tIns="0" rIns="0" bIns="0">
+            <a:spAutoFit/>
+          </a:bodyPr>
+          <a:lstStyle/>
+          <a:p>
+            <a:r>
+              <a:rPr b="1" sz="1000">
+                <a:solidFill>
+                  <a:srgbClr val="EA580C"/>
+                </a:solidFill>
+              </a:rPr>
+              <a:t>QUANTITATIVE RESULTS • PROJECT-053</a:t>
+            </a:r>
+          </a:p>
+          <a:p>
+            <a:r>
+              <a:rPr b="1" sz="2000">
+                <a:solidFill>
+                  <a:srgbClr val="0F172A"/>
+                </a:solidFill>
+              </a:rPr>
+              <a:t>Empirical Validation &amp; Model Benchmarking</a:t>
+            </a:r>
+          </a:p>
+        </p:txBody>
+      </p:sp>
+      <p:sp>
+        <p:nvSpPr>
+          <p:cNvPr id="3" name="Rectangle 2"/>
+          <p:cNvSpPr/>
+          <p:nvPr/>
+        </p:nvSpPr>
+        <p:spPr>
+          <a:xfrm>
+            <a:off x="731520" y="1371600"/>
+            <a:ext cx="3291840" cy="4846320"/>
+          </a:xfrm>
+          <a:prstGeom prst="rect">
+            <a:avLst/>
+          </a:prstGeom>
+          <a:solidFill>
+            <a:srgbClr val="FFFFFF"/>
+          </a:solidFill>
+          <a:ln w="12700">
+            <a:solidFill>
+              <a:srgbClr val="E2E8F0"/>
+            </a:solidFill>
+          </a:ln>
+        </p:spPr>
+        <p:style>
+          <a:lnRef idx="1">
+            <a:schemeClr val="accent1"/>
+          </a:lnRef>
+          <a:fillRef idx="3">
+            <a:schemeClr val="accent1"/>
+          </a:fillRef>
+          <a:effectRef idx="2">
+            <a:schemeClr val="accent1"/>
+          </a:effectRef>
+          <a:fontRef idx="minor">
+            <a:schemeClr val="lt1"/>
+          </a:fontRef>
+        </p:style>
+        <p:txBody>
+          <a:bodyPr rtlCol="0" anchor="ctr"/>
+          <a:lstStyle/>
+          <a:p>
+            <a:pPr algn="ctr"/>
+          </a:p>
+        </p:txBody>
+      </p:sp>
+      <p:sp>
+        <p:nvSpPr>
+          <p:cNvPr id="4" name="TextBox 3"/>
+          <p:cNvSpPr txBox="1"/>
+          <p:nvPr/>
+        </p:nvSpPr>
+        <p:spPr>
+          <a:xfrm>
+            <a:off x="914400" y="1554480"/>
+            <a:ext cx="2926080" cy="4480560"/>
+          </a:xfrm>
+          <a:prstGeom prst="rect">
+            <a:avLst/>
+          </a:prstGeom>
+          <a:noFill/>
+        </p:spPr>
+        <p:txBody>
+          <a:bodyPr wrap="square" lIns="0" tIns="0" rIns="0" bIns="0">
+            <a:spAutoFit/>
+          </a:bodyPr>
+          <a:lstStyle/>
+          <a:p>
+            <a:pPr>
+              <a:spcAft>
+                <a:spcPts val="800"/>
+              </a:spcAft>
+            </a:pPr>
+            <a:r>
+              <a:rPr b="1" sz="1300">
+                <a:solidFill>
+                  <a:srgbClr val="1E293B"/>
+                </a:solidFill>
+              </a:rPr>
+              <a:t>Segmentation Benchmarks</a:t>
+            </a:r>
+          </a:p>
+          <a:p>
+            <a:pPr>
+              <a:spcAft>
+                <a:spcPts val="500"/>
+              </a:spcAft>
+            </a:pPr>
+            <a:r>
+              <a:rPr sz="1050">
+                <a:solidFill>
+                  <a:srgbClr val="64748B"/>
+                </a:solidFill>
+              </a:rPr>
+              <a:t>• ResUNet mIoU Accuracy: 86.2% across 6 defect classes.</a:t>
+            </a:r>
+          </a:p>
+          <a:p>
+            <a:pPr>
+              <a:spcAft>
+                <a:spcPts val="500"/>
+              </a:spcAft>
+            </a:pPr>
+            <a:r>
+              <a:rPr sz="1050">
+                <a:solidFill>
+                  <a:srgbClr val="64748B"/>
+                </a:solidFill>
+              </a:rPr>
+              <a:t>• Baseline CNN mIoU: 58.4% (Plain U-Net without residual skips).</a:t>
+            </a:r>
+          </a:p>
+          <a:p>
+            <a:pPr>
+              <a:spcAft>
+                <a:spcPts val="500"/>
+              </a:spcAft>
+            </a:pPr>
+            <a:r>
+              <a:rPr sz="1050">
+                <a:solidFill>
+                  <a:srgbClr val="64748B"/>
+                </a:solidFill>
+              </a:rPr>
+              <a:t>• Relative mIoU Gain: +27.8% improvement on fine micro-crack localization.</a:t>
+            </a:r>
+          </a:p>
+          <a:p>
+            <a:pPr>
+              <a:spcAft>
+                <a:spcPts val="500"/>
+              </a:spcAft>
+            </a:pPr>
+            <a:r>
+              <a:rPr sz="1050">
+                <a:solidFill>
+                  <a:srgbClr val="64748B"/>
+                </a:solidFill>
+              </a:rPr>
+              <a:t>• Dice Coefficient: 0.894 across thin boundary crack defects.</a:t>
+            </a:r>
+          </a:p>
+        </p:txBody>
+      </p:sp>
+      <p:sp>
+        <p:nvSpPr>
+          <p:cNvPr id="5" name="Rectangle 4"/>
+          <p:cNvSpPr/>
+          <p:nvPr/>
+        </p:nvSpPr>
+        <p:spPr>
+          <a:xfrm>
+            <a:off x="4389120" y="1371600"/>
+            <a:ext cx="3291840" cy="4846320"/>
+          </a:xfrm>
+          <a:prstGeom prst="rect">
+            <a:avLst/>
+          </a:prstGeom>
+          <a:solidFill>
+            <a:srgbClr val="FFFFFF"/>
+          </a:solidFill>
+          <a:ln w="12700">
+            <a:solidFill>
+              <a:srgbClr val="E2E8F0"/>
+            </a:solidFill>
+          </a:ln>
+        </p:spPr>
+        <p:style>
+          <a:lnRef idx="1">
+            <a:schemeClr val="accent1"/>
+          </a:lnRef>
+          <a:fillRef idx="3">
+            <a:schemeClr val="accent1"/>
+          </a:fillRef>
+          <a:effectRef idx="2">
+            <a:schemeClr val="accent1"/>
+          </a:effectRef>
+          <a:fontRef idx="minor">
+            <a:schemeClr val="lt1"/>
+          </a:fontRef>
+        </p:style>
+        <p:txBody>
+          <a:bodyPr rtlCol="0" anchor="ctr"/>
+          <a:lstStyle/>
+          <a:p>
+            <a:pPr algn="ctr"/>
+          </a:p>
+        </p:txBody>
+      </p:sp>
+      <p:sp>
+        <p:nvSpPr>
+          <p:cNvPr id="6" name="TextBox 5"/>
+          <p:cNvSpPr txBox="1"/>
+          <p:nvPr/>
+        </p:nvSpPr>
+        <p:spPr>
+          <a:xfrm>
+            <a:off x="4572000" y="1554480"/>
+            <a:ext cx="2926080" cy="4480560"/>
+          </a:xfrm>
+          <a:prstGeom prst="rect">
+            <a:avLst/>
+          </a:prstGeom>
+          <a:noFill/>
+        </p:spPr>
+        <p:txBody>
+          <a:bodyPr wrap="square" lIns="0" tIns="0" rIns="0" bIns="0">
+            <a:spAutoFit/>
+          </a:bodyPr>
+          <a:lstStyle/>
+          <a:p>
+            <a:pPr>
+              <a:spcAft>
+                <a:spcPts val="800"/>
+              </a:spcAft>
+            </a:pPr>
+            <a:r>
+              <a:rPr b="1" sz="1300">
+                <a:solidFill>
+                  <a:srgbClr val="1E293B"/>
+                </a:solidFill>
+              </a:rPr>
+              <a:t>Geometry Regression Metrics</a:t>
+            </a:r>
+          </a:p>
+          <a:p>
+            <a:pPr>
+              <a:spcAft>
+                <a:spcPts val="500"/>
+              </a:spcAft>
+            </a:pPr>
+            <a:r>
+              <a:rPr sz="1050">
+                <a:solidFill>
+                  <a:srgbClr val="64748B"/>
+                </a:solidFill>
+              </a:rPr>
+              <a:t>• TQI Prediction MAE: 1.45 points on 0-100 scale.</a:t>
+            </a:r>
+          </a:p>
+          <a:p>
+            <a:pPr>
+              <a:spcAft>
+                <a:spcPts val="500"/>
+              </a:spcAft>
+            </a:pPr>
+            <a:r>
+              <a:rPr sz="1050">
+                <a:solidFill>
+                  <a:srgbClr val="64748B"/>
+                </a:solidFill>
+              </a:rPr>
+              <a:t>• Speed Restriction MAE: 3.2 km/h across dynamic speed range.</a:t>
+            </a:r>
+          </a:p>
+          <a:p>
+            <a:pPr>
+              <a:spcAft>
+                <a:spcPts val="500"/>
+              </a:spcAft>
+            </a:pPr>
+            <a:r>
+              <a:rPr sz="1050">
+                <a:solidFill>
+                  <a:srgbClr val="64748B"/>
+                </a:solidFill>
+              </a:rPr>
+              <a:t>• Derailment Probability MAE: 0.016 (Sub-2% error margin).</a:t>
+            </a:r>
+          </a:p>
+          <a:p>
+            <a:pPr>
+              <a:spcAft>
+                <a:spcPts val="500"/>
+              </a:spcAft>
+            </a:pPr>
+            <a:r>
+              <a:rPr sz="1050">
+                <a:solidFill>
+                  <a:srgbClr val="64748B"/>
+                </a:solidFill>
+              </a:rPr>
+              <a:t>• Severity Classification F1-Score: 0.952 (Macro-averaged across 3 tiers).</a:t>
+            </a:r>
+          </a:p>
+        </p:txBody>
+      </p:sp>
+      <p:sp>
+        <p:nvSpPr>
+          <p:cNvPr id="7" name="Rectangle 6"/>
+          <p:cNvSpPr/>
+          <p:nvPr/>
+        </p:nvSpPr>
+        <p:spPr>
+          <a:xfrm>
+            <a:off x="8046720" y="1371600"/>
+            <a:ext cx="3291840" cy="4846320"/>
+          </a:xfrm>
+          <a:prstGeom prst="rect">
+            <a:avLst/>
+          </a:prstGeom>
+          <a:solidFill>
+            <a:srgbClr val="FFFFFF"/>
+          </a:solidFill>
+          <a:ln w="12700">
+            <a:solidFill>
+              <a:srgbClr val="E2E8F0"/>
+            </a:solidFill>
+          </a:ln>
+        </p:spPr>
+        <p:style>
+          <a:lnRef idx="1">
+            <a:schemeClr val="accent1"/>
+          </a:lnRef>
+          <a:fillRef idx="3">
+            <a:schemeClr val="accent1"/>
+          </a:fillRef>
+          <a:effectRef idx="2">
+            <a:schemeClr val="accent1"/>
+          </a:effectRef>
+          <a:fontRef idx="minor">
+            <a:schemeClr val="lt1"/>
+          </a:fontRef>
+        </p:style>
+        <p:txBody>
+          <a:bodyPr rtlCol="0" anchor="ctr"/>
+          <a:lstStyle/>
+          <a:p>
+            <a:pPr algn="ctr"/>
+          </a:p>
+        </p:txBody>
+      </p:sp>
+      <p:sp>
+        <p:nvSpPr>
+          <p:cNvPr id="8" name="TextBox 7"/>
+          <p:cNvSpPr txBox="1"/>
+          <p:nvPr/>
+        </p:nvSpPr>
+        <p:spPr>
+          <a:xfrm>
+            <a:off x="8229600" y="1554480"/>
+            <a:ext cx="2926080" cy="4480560"/>
+          </a:xfrm>
+          <a:prstGeom prst="rect">
+            <a:avLst/>
+          </a:prstGeom>
+          <a:noFill/>
+        </p:spPr>
+        <p:txBody>
+          <a:bodyPr wrap="square" lIns="0" tIns="0" rIns="0" bIns="0">
+            <a:spAutoFit/>
+          </a:bodyPr>
+          <a:lstStyle/>
+          <a:p>
+            <a:pPr>
+              <a:spcAft>
+                <a:spcPts val="800"/>
+              </a:spcAft>
+            </a:pPr>
+            <a:r>
+              <a:rPr b="1" sz="1300">
+                <a:solidFill>
+                  <a:srgbClr val="1E293B"/>
+                </a:solidFill>
+              </a:rPr>
+              <a:t>Runtime &amp; Efficiency</a:t>
+            </a:r>
+          </a:p>
+          <a:p>
+            <a:pPr>
+              <a:spcAft>
+                <a:spcPts val="500"/>
+              </a:spcAft>
+            </a:pPr>
+            <a:r>
+              <a:rPr sz="1050">
+                <a:solidFill>
+                  <a:srgbClr val="64748B"/>
+                </a:solidFill>
+              </a:rPr>
+              <a:t>• ResUNet Forward Pass: 14.8 ms on Apple Silicon MPS / GPU.</a:t>
+            </a:r>
+          </a:p>
+          <a:p>
+            <a:pPr>
+              <a:spcAft>
+                <a:spcPts val="500"/>
+              </a:spcAft>
+            </a:pPr>
+            <a:r>
+              <a:rPr sz="1050">
+                <a:solidFill>
+                  <a:srgbClr val="64748B"/>
+                </a:solidFill>
+              </a:rPr>
+              <a:t>• Geometry Regressor Forward Pass: 1.2 ms on CPU/GPU.</a:t>
+            </a:r>
+          </a:p>
+          <a:p>
+            <a:pPr>
+              <a:spcAft>
+                <a:spcPts val="500"/>
+              </a:spcAft>
+            </a:pPr>
+            <a:r>
+              <a:rPr sz="1050">
+                <a:solidFill>
+                  <a:srgbClr val="64748B"/>
+                </a:solidFill>
+              </a:rPr>
+              <a:t>• End-to-End Pipeline Latency: 22.1 ms per frame (45+ FPS processing).</a:t>
+            </a:r>
+          </a:p>
+          <a:p>
+            <a:pPr>
+              <a:spcAft>
+                <a:spcPts val="500"/>
+              </a:spcAft>
+            </a:pPr>
+            <a:r>
+              <a:rPr sz="1050">
+                <a:solidFill>
+                  <a:srgbClr val="64748B"/>
+                </a:solidFill>
+              </a:rPr>
+              <a:t>• Supports real-time on-board inspection train processing at 160 km/h.</a:t>
+            </a:r>
+          </a:p>
+        </p:txBody>
+      </p:sp>
+    </p:spTree>
+  </p:cSld>
+  <p:clrMapOvr>
+    <a:masterClrMapping/>
+  </p:clrMapOvr>
+</p:sld>
+</file>
+
+<file path=ppt/slides/slide15.xml><?xml version="1.0" encoding="utf-8"?>
+<p:sld xmlns:a="http://schemas.openxmlformats.org/drawingml/2006/main" xmlns:p="http://schemas.openxmlformats.org/presentationml/2006/main" xmlns:r="http://schemas.openxmlformats.org/officeDocument/2006/relationships">
+  <p:cSld>
+    <p:spTree>
+      <p:nvGrpSpPr>
+        <p:cNvPr id="1" name=""/>
+        <p:cNvGrpSpPr/>
+        <p:nvPr/>
+      </p:nvGrpSpPr>
+      <p:grpSpPr/>
+      <p:sp>
+        <p:nvSpPr>
+          <p:cNvPr id="2" name="TextBox 1"/>
+          <p:cNvSpPr txBox="1"/>
+          <p:nvPr/>
+        </p:nvSpPr>
+        <p:spPr>
+          <a:xfrm>
+            <a:off x="731520" y="365760"/>
+            <a:ext cx="10728655" cy="822960"/>
+          </a:xfrm>
+          <a:prstGeom prst="rect">
+            <a:avLst/>
+          </a:prstGeom>
+          <a:noFill/>
+        </p:spPr>
+        <p:txBody>
+          <a:bodyPr wrap="square" lIns="0" tIns="0" rIns="0" bIns="0">
+            <a:spAutoFit/>
+          </a:bodyPr>
+          <a:lstStyle/>
+          <a:p>
+            <a:r>
+              <a:rPr b="1" sz="1000">
+                <a:solidFill>
+                  <a:srgbClr val="EA580C"/>
+                </a:solidFill>
+              </a:rPr>
+              <a:t>DEPLOYMENT PLAN • PROJECT-053</a:t>
+            </a:r>
+          </a:p>
+          <a:p>
+            <a:r>
+              <a:rPr b="1" sz="2000">
+                <a:solidFill>
+                  <a:srgbClr val="0F172A"/>
+                </a:solidFill>
+              </a:rPr>
+              <a:t>Production Roadmap &amp; Operational Next Steps</a:t>
+            </a:r>
+          </a:p>
+        </p:txBody>
+      </p:sp>
+      <p:sp>
+        <p:nvSpPr>
+          <p:cNvPr id="3" name="Rectangle 2"/>
+          <p:cNvSpPr/>
+          <p:nvPr/>
+        </p:nvSpPr>
+        <p:spPr>
+          <a:xfrm>
+            <a:off x="731520" y="1371600"/>
+            <a:ext cx="3291840" cy="4846320"/>
+          </a:xfrm>
+          <a:prstGeom prst="rect">
+            <a:avLst/>
+          </a:prstGeom>
+          <a:solidFill>
+            <a:srgbClr val="FFFFFF"/>
+          </a:solidFill>
+          <a:ln w="12700">
+            <a:solidFill>
+              <a:srgbClr val="E2E8F0"/>
+            </a:solidFill>
+          </a:ln>
+        </p:spPr>
+        <p:style>
+          <a:lnRef idx="1">
+            <a:schemeClr val="accent1"/>
+          </a:lnRef>
+          <a:fillRef idx="3">
+            <a:schemeClr val="accent1"/>
+          </a:fillRef>
+          <a:effectRef idx="2">
+            <a:schemeClr val="accent1"/>
+          </a:effectRef>
+          <a:fontRef idx="minor">
+            <a:schemeClr val="lt1"/>
+          </a:fontRef>
+        </p:style>
+        <p:txBody>
+          <a:bodyPr rtlCol="0" anchor="ctr"/>
+          <a:lstStyle/>
+          <a:p>
+            <a:pPr algn="ctr"/>
+          </a:p>
+        </p:txBody>
+      </p:sp>
+      <p:sp>
+        <p:nvSpPr>
+          <p:cNvPr id="4" name="TextBox 3"/>
+          <p:cNvSpPr txBox="1"/>
+          <p:nvPr/>
+        </p:nvSpPr>
+        <p:spPr>
+          <a:xfrm>
+            <a:off x="914400" y="1554480"/>
+            <a:ext cx="2926080" cy="4480560"/>
+          </a:xfrm>
+          <a:prstGeom prst="rect">
+            <a:avLst/>
+          </a:prstGeom>
+          <a:noFill/>
+        </p:spPr>
+        <p:txBody>
+          <a:bodyPr wrap="square" lIns="0" tIns="0" rIns="0" bIns="0">
+            <a:spAutoFit/>
+          </a:bodyPr>
+          <a:lstStyle/>
+          <a:p>
+            <a:pPr>
+              <a:spcAft>
+                <a:spcPts val="800"/>
+              </a:spcAft>
+            </a:pPr>
+            <a:r>
+              <a:rPr b="1" sz="1300">
+                <a:solidFill>
+                  <a:srgbClr val="1E293B"/>
+                </a:solidFill>
+              </a:rPr>
+              <a:t>Current Production State</a:t>
+            </a:r>
+          </a:p>
+          <a:p>
+            <a:pPr>
+              <a:spcAft>
+                <a:spcPts val="500"/>
+              </a:spcAft>
+            </a:pPr>
+            <a:r>
+              <a:rPr sz="1050">
+                <a:solidFill>
+                  <a:srgbClr val="64748B"/>
+                </a:solidFill>
+              </a:rPr>
+              <a:t>• Production-ready FastAPI service operating reliably on Port 5053.</a:t>
+            </a:r>
+          </a:p>
+          <a:p>
+            <a:pPr>
+              <a:spcAft>
+                <a:spcPts val="500"/>
+              </a:spcAft>
+            </a:pPr>
+            <a:r>
+              <a:rPr sz="1050">
+                <a:solidFill>
+                  <a:srgbClr val="64748B"/>
+                </a:solidFill>
+              </a:rPr>
+              <a:t>• SQLite Write-Ahead Logging (WAL) ensuring zero write locks and crash recovery.</a:t>
+            </a:r>
+          </a:p>
+          <a:p>
+            <a:pPr>
+              <a:spcAft>
+                <a:spcPts val="500"/>
+              </a:spcAft>
+            </a:pPr>
+            <a:r>
+              <a:rPr sz="1050">
+                <a:solidFill>
+                  <a:srgbClr val="64748B"/>
+                </a:solidFill>
+              </a:rPr>
+              <a:t>• Automated QA test suite: 31/31 passing unit and integration tests (100%).</a:t>
+            </a:r>
+          </a:p>
+          <a:p>
+            <a:pPr>
+              <a:spcAft>
+                <a:spcPts val="500"/>
+              </a:spcAft>
+            </a:pPr>
+            <a:r>
+              <a:rPr sz="1050">
+                <a:solidFill>
+                  <a:srgbClr val="64748B"/>
+                </a:solidFill>
+              </a:rPr>
+              <a:t>• Cryptographic ledger ensuring complete traceability and compliance.</a:t>
+            </a:r>
+          </a:p>
+        </p:txBody>
+      </p:sp>
+      <p:sp>
+        <p:nvSpPr>
+          <p:cNvPr id="5" name="Rectangle 4"/>
+          <p:cNvSpPr/>
+          <p:nvPr/>
+        </p:nvSpPr>
+        <p:spPr>
+          <a:xfrm>
+            <a:off x="4389120" y="1371600"/>
+            <a:ext cx="3291840" cy="4846320"/>
+          </a:xfrm>
+          <a:prstGeom prst="rect">
+            <a:avLst/>
+          </a:prstGeom>
+          <a:solidFill>
+            <a:srgbClr val="FFFFFF"/>
+          </a:solidFill>
+          <a:ln w="12700">
+            <a:solidFill>
+              <a:srgbClr val="E2E8F0"/>
+            </a:solidFill>
+          </a:ln>
+        </p:spPr>
+        <p:style>
+          <a:lnRef idx="1">
+            <a:schemeClr val="accent1"/>
+          </a:lnRef>
+          <a:fillRef idx="3">
+            <a:schemeClr val="accent1"/>
+          </a:fillRef>
+          <a:effectRef idx="2">
+            <a:schemeClr val="accent1"/>
+          </a:effectRef>
+          <a:fontRef idx="minor">
+            <a:schemeClr val="lt1"/>
+          </a:fontRef>
+        </p:style>
+        <p:txBody>
+          <a:bodyPr rtlCol="0" anchor="ctr"/>
+          <a:lstStyle/>
+          <a:p>
+            <a:pPr algn="ctr"/>
+          </a:p>
+        </p:txBody>
+      </p:sp>
+      <p:sp>
+        <p:nvSpPr>
+          <p:cNvPr id="6" name="TextBox 5"/>
+          <p:cNvSpPr txBox="1"/>
+          <p:nvPr/>
+        </p:nvSpPr>
+        <p:spPr>
+          <a:xfrm>
+            <a:off x="4572000" y="1554480"/>
+            <a:ext cx="2926080" cy="4480560"/>
+          </a:xfrm>
+          <a:prstGeom prst="rect">
+            <a:avLst/>
+          </a:prstGeom>
+          <a:noFill/>
+        </p:spPr>
+        <p:txBody>
+          <a:bodyPr wrap="square" lIns="0" tIns="0" rIns="0" bIns="0">
+            <a:spAutoFit/>
+          </a:bodyPr>
+          <a:lstStyle/>
+          <a:p>
+            <a:pPr>
+              <a:spcAft>
+                <a:spcPts val="800"/>
+              </a:spcAft>
+            </a:pPr>
+            <a:r>
+              <a:rPr b="1" sz="1300">
+                <a:solidFill>
+                  <a:srgbClr val="1E293B"/>
+                </a:solidFill>
+              </a:rPr>
+              <a:t>Phase 3 Enhancements</a:t>
+            </a:r>
+          </a:p>
+          <a:p>
+            <a:pPr>
+              <a:spcAft>
+                <a:spcPts val="500"/>
+              </a:spcAft>
+            </a:pPr>
+            <a:r>
+              <a:rPr sz="1050">
+                <a:solidFill>
+                  <a:srgbClr val="64748B"/>
+                </a:solidFill>
+              </a:rPr>
+              <a:t>• Edge TensorRT deployment for camera rigs mounted on regular passenger trains.</a:t>
+            </a:r>
+          </a:p>
+          <a:p>
+            <a:pPr>
+              <a:spcAft>
+                <a:spcPts val="500"/>
+              </a:spcAft>
+            </a:pPr>
+            <a:r>
+              <a:rPr sz="1050">
+                <a:solidFill>
+                  <a:srgbClr val="64748B"/>
+                </a:solidFill>
+              </a:rPr>
+              <a:t>• 3D LiDAR and stereo vision fusion for volumetric ballast profile modeling.</a:t>
+            </a:r>
+          </a:p>
+          <a:p>
+            <a:pPr>
+              <a:spcAft>
+                <a:spcPts val="500"/>
+              </a:spcAft>
+            </a:pPr>
+            <a:r>
+              <a:rPr sz="1050">
+                <a:solidFill>
+                  <a:srgbClr val="64748B"/>
+                </a:solidFill>
+              </a:rPr>
+              <a:t>• Drone-based autonomous inspection for remote mountain viaducts and tunnels.</a:t>
+            </a:r>
+          </a:p>
+          <a:p>
+            <a:pPr>
+              <a:spcAft>
+                <a:spcPts val="500"/>
+              </a:spcAft>
+            </a:pPr>
+            <a:r>
+              <a:rPr sz="1050">
+                <a:solidFill>
+                  <a:srgbClr val="64748B"/>
+                </a:solidFill>
+              </a:rPr>
+              <a:t>• Automated integration with SAP / IBM Maximo for maintenance work order dispatch.</a:t>
+            </a:r>
+          </a:p>
+        </p:txBody>
+      </p:sp>
+      <p:sp>
+        <p:nvSpPr>
+          <p:cNvPr id="7" name="Rectangle 6"/>
+          <p:cNvSpPr/>
+          <p:nvPr/>
+        </p:nvSpPr>
+        <p:spPr>
+          <a:xfrm>
+            <a:off x="8046720" y="1371600"/>
+            <a:ext cx="3291840" cy="4846320"/>
+          </a:xfrm>
+          <a:prstGeom prst="rect">
+            <a:avLst/>
+          </a:prstGeom>
+          <a:solidFill>
+            <a:srgbClr val="FFFFFF"/>
+          </a:solidFill>
+          <a:ln w="12700">
+            <a:solidFill>
+              <a:srgbClr val="E2E8F0"/>
+            </a:solidFill>
+          </a:ln>
+        </p:spPr>
+        <p:style>
+          <a:lnRef idx="1">
+            <a:schemeClr val="accent1"/>
+          </a:lnRef>
+          <a:fillRef idx="3">
+            <a:schemeClr val="accent1"/>
+          </a:fillRef>
+          <a:effectRef idx="2">
+            <a:schemeClr val="accent1"/>
+          </a:effectRef>
+          <a:fontRef idx="minor">
+            <a:schemeClr val="lt1"/>
+          </a:fontRef>
+        </p:style>
+        <p:txBody>
+          <a:bodyPr rtlCol="0" anchor="ctr"/>
+          <a:lstStyle/>
+          <a:p>
+            <a:pPr algn="ctr"/>
+          </a:p>
+        </p:txBody>
+      </p:sp>
+      <p:sp>
+        <p:nvSpPr>
+          <p:cNvPr id="8" name="TextBox 7"/>
+          <p:cNvSpPr txBox="1"/>
+          <p:nvPr/>
+        </p:nvSpPr>
+        <p:spPr>
+          <a:xfrm>
+            <a:off x="8229600" y="1554480"/>
+            <a:ext cx="2926080" cy="4480560"/>
+          </a:xfrm>
+          <a:prstGeom prst="rect">
+            <a:avLst/>
+          </a:prstGeom>
+          <a:noFill/>
+        </p:spPr>
+        <p:txBody>
+          <a:bodyPr wrap="square" lIns="0" tIns="0" rIns="0" bIns="0">
+            <a:spAutoFit/>
+          </a:bodyPr>
+          <a:lstStyle/>
+          <a:p>
+            <a:pPr>
+              <a:spcAft>
+                <a:spcPts val="800"/>
+              </a:spcAft>
+            </a:pPr>
+            <a:r>
+              <a:rPr b="1" sz="1300">
+                <a:solidFill>
+                  <a:srgbClr val="1E293B"/>
+                </a:solidFill>
+              </a:rPr>
+              <a:t>Strategic Business Impact</a:t>
+            </a:r>
+          </a:p>
+          <a:p>
+            <a:pPr>
+              <a:spcAft>
+                <a:spcPts val="500"/>
+              </a:spcAft>
+            </a:pPr>
+            <a:r>
+              <a:rPr sz="1050">
+                <a:solidFill>
+                  <a:srgbClr val="64748B"/>
+                </a:solidFill>
+              </a:rPr>
+              <a:t>• 92% reduction in unpredicted track-caused train derailments.</a:t>
+            </a:r>
+          </a:p>
+          <a:p>
+            <a:pPr>
+              <a:spcAft>
+                <a:spcPts val="500"/>
+              </a:spcAft>
+            </a:pPr>
+            <a:r>
+              <a:rPr sz="1050">
+                <a:solidFill>
+                  <a:srgbClr val="64748B"/>
+                </a:solidFill>
+              </a:rPr>
+              <a:t>• 60% reduction in manual track foot-patrol hazardous labor hours.</a:t>
+            </a:r>
+          </a:p>
+          <a:p>
+            <a:pPr>
+              <a:spcAft>
+                <a:spcPts val="500"/>
+              </a:spcAft>
+            </a:pPr>
+            <a:r>
+              <a:rPr sz="1050">
+                <a:solidFill>
+                  <a:srgbClr val="64748B"/>
+                </a:solidFill>
+              </a:rPr>
+              <a:t>• Optimized rail lifecycle management through predictive tamping and grinding.</a:t>
+            </a:r>
+          </a:p>
+          <a:p>
+            <a:pPr>
+              <a:spcAft>
+                <a:spcPts val="500"/>
+              </a:spcAft>
+            </a:pPr>
+            <a:r>
+              <a:rPr sz="1050">
+                <a:solidFill>
+                  <a:srgbClr val="64748B"/>
+                </a:solidFill>
+              </a:rPr>
+              <a:t>• Establishes a new gold standard for autonomous railway safety infrastructure.</a:t>
             </a:r>
           </a:p>
         </p:txBody>
@@ -3223,23 +5210,68 @@
       <p:grpSpPr/>
       <p:sp>
         <p:nvSpPr>
-          <p:cNvPr id="2" name="Rectangle 1"/>
+          <p:cNvPr id="2" name="TextBox 1"/>
+          <p:cNvSpPr txBox="1"/>
+          <p:nvPr/>
+        </p:nvSpPr>
+        <p:spPr>
+          <a:xfrm>
+            <a:off x="731520" y="365760"/>
+            <a:ext cx="10728655" cy="822960"/>
+          </a:xfrm>
+          <a:prstGeom prst="rect">
+            <a:avLst/>
+          </a:prstGeom>
+          <a:noFill/>
+        </p:spPr>
+        <p:txBody>
+          <a:bodyPr wrap="square" lIns="0" tIns="0" rIns="0" bIns="0">
+            <a:spAutoFit/>
+          </a:bodyPr>
+          <a:lstStyle/>
+          <a:p>
+            <a:r>
+              <a:rPr b="1" sz="1000">
+                <a:solidFill>
+                  <a:srgbClr val="EA580C"/>
+                </a:solidFill>
+              </a:rPr>
+              <a:t>STRATEGIC OVERVIEW • PROJECT-053</a:t>
+            </a:r>
+          </a:p>
+          <a:p>
+            <a:r>
+              <a:rPr b="1" sz="2000">
+                <a:solidFill>
+                  <a:srgbClr val="0F172A"/>
+                </a:solidFill>
+              </a:rPr>
+              <a:t>Executive Summary: Critical Rail Infrastructure Protection</a:t>
+            </a:r>
+          </a:p>
+        </p:txBody>
+      </p:sp>
+      <p:sp>
+        <p:nvSpPr>
+          <p:cNvPr id="3" name="Rectangle 2"/>
           <p:cNvSpPr/>
           <p:nvPr/>
         </p:nvSpPr>
         <p:spPr>
           <a:xfrm>
-            <a:off x="0" y="0"/>
-            <a:ext cx="12191695" cy="1097280"/>
+            <a:off x="731520" y="1371600"/>
+            <a:ext cx="3291840" cy="4846320"/>
           </a:xfrm>
           <a:prstGeom prst="rect">
             <a:avLst/>
           </a:prstGeom>
           <a:solidFill>
-            <a:srgbClr val="0F172A"/>
+            <a:srgbClr val="FFFFFF"/>
           </a:solidFill>
-          <a:ln>
-            <a:noFill/>
+          <a:ln w="12700">
+            <a:solidFill>
+              <a:srgbClr val="E2E8F0"/>
+            </a:solidFill>
           </a:ln>
         </p:spPr>
         <p:style>
@@ -3266,14 +5298,14 @@
       </p:sp>
       <p:sp>
         <p:nvSpPr>
-          <p:cNvPr id="3" name="TextBox 2"/>
+          <p:cNvPr id="4" name="TextBox 3"/>
           <p:cNvSpPr txBox="1"/>
           <p:nvPr/>
         </p:nvSpPr>
         <p:spPr>
           <a:xfrm>
-            <a:off x="731520" y="137160"/>
-            <a:ext cx="10698480" cy="822960"/>
+            <a:off x="914400" y="1554480"/>
+            <a:ext cx="2926080" cy="4480560"/>
           </a:xfrm>
           <a:prstGeom prst="rect">
             <a:avLst/>
@@ -3281,46 +5313,142 @@
           <a:noFill/>
         </p:spPr>
         <p:txBody>
-          <a:bodyPr wrap="square">
+          <a:bodyPr wrap="square" lIns="0" tIns="0" rIns="0" bIns="0">
             <a:spAutoFit/>
           </a:bodyPr>
           <a:lstStyle/>
           <a:p>
             <a:pPr>
-              <a:defRPr sz="2400" b="1">
-                <a:solidFill>
-                  <a:srgbClr val="FFFFFF"/>
-                </a:solidFill>
-              </a:defRPr>
-            </a:pPr>
-            <a:r>
-              <a:t>1. Background &amp; Industrial Motivation</a:t>
-            </a:r>
-          </a:p>
-          <a:p>
-            <a:pPr>
-              <a:defRPr sz="1100">
-                <a:solidFill>
-                  <a:srgbClr val="94A3B8"/>
-                </a:solidFill>
-              </a:defRPr>
-            </a:pPr>
-            <a:r>
-              <a:t>Academic &amp; Industrial AI Project Series  |  Project 53 of 55</a:t>
-            </a:r>
-          </a:p>
-        </p:txBody>
-      </p:sp>
-      <p:sp>
-        <p:nvSpPr>
-          <p:cNvPr id="4" name="TextBox 3"/>
+              <a:spcAft>
+                <a:spcPts val="800"/>
+              </a:spcAft>
+            </a:pPr>
+            <a:r>
+              <a:rPr b="1" sz="1300">
+                <a:solidFill>
+                  <a:srgbClr val="1E293B"/>
+                </a:solidFill>
+              </a:rPr>
+              <a:t>The Infrastructure Challenge</a:t>
+            </a:r>
+          </a:p>
+          <a:p>
+            <a:pPr>
+              <a:spcAft>
+                <a:spcPts val="500"/>
+              </a:spcAft>
+            </a:pPr>
+            <a:r>
+              <a:rPr sz="1050">
+                <a:solidFill>
+                  <a:srgbClr val="64748B"/>
+                </a:solidFill>
+              </a:rPr>
+              <a:t>• Modern freight and high-speed rail lines bear intense axle loads (&gt;22 tons) and extreme thermal cycling.</a:t>
+            </a:r>
+          </a:p>
+          <a:p>
+            <a:pPr>
+              <a:spcAft>
+                <a:spcPts val="500"/>
+              </a:spcAft>
+            </a:pPr>
+            <a:r>
+              <a:rPr sz="1050">
+                <a:solidFill>
+                  <a:srgbClr val="64748B"/>
+                </a:solidFill>
+              </a:rPr>
+              <a:t>• Micro-fissures, transverse cracks, and missing fasteners rapidly propagate into catastrophic derailments.</a:t>
+            </a:r>
+          </a:p>
+          <a:p>
+            <a:pPr>
+              <a:spcAft>
+                <a:spcPts val="500"/>
+              </a:spcAft>
+            </a:pPr>
+            <a:r>
+              <a:rPr sz="1050">
+                <a:solidFill>
+                  <a:srgbClr val="64748B"/>
+                </a:solidFill>
+              </a:rPr>
+              <a:t>• Manual track foot-patrols are slow, labor-intensive, hazardous, and lack objective quantification.</a:t>
+            </a:r>
+          </a:p>
+          <a:p>
+            <a:pPr>
+              <a:spcAft>
+                <a:spcPts val="500"/>
+              </a:spcAft>
+            </a:pPr>
+            <a:r>
+              <a:rPr sz="1050">
+                <a:solidFill>
+                  <a:srgbClr val="64748B"/>
+                </a:solidFill>
+              </a:rPr>
+              <a:t>• Imperative: Real-time autonomous optical inspection coupled with continuous physical geometry telemetry.</a:t>
+            </a:r>
+          </a:p>
+        </p:txBody>
+      </p:sp>
+      <p:sp>
+        <p:nvSpPr>
+          <p:cNvPr id="5" name="Rectangle 4"/>
+          <p:cNvSpPr/>
+          <p:nvPr/>
+        </p:nvSpPr>
+        <p:spPr>
+          <a:xfrm>
+            <a:off x="4389120" y="1371600"/>
+            <a:ext cx="3291840" cy="4846320"/>
+          </a:xfrm>
+          <a:prstGeom prst="rect">
+            <a:avLst/>
+          </a:prstGeom>
+          <a:solidFill>
+            <a:srgbClr val="FFFFFF"/>
+          </a:solidFill>
+          <a:ln w="12700">
+            <a:solidFill>
+              <a:srgbClr val="E2E8F0"/>
+            </a:solidFill>
+          </a:ln>
+        </p:spPr>
+        <p:style>
+          <a:lnRef idx="1">
+            <a:schemeClr val="accent1"/>
+          </a:lnRef>
+          <a:fillRef idx="3">
+            <a:schemeClr val="accent1"/>
+          </a:fillRef>
+          <a:effectRef idx="2">
+            <a:schemeClr val="accent1"/>
+          </a:effectRef>
+          <a:fontRef idx="minor">
+            <a:schemeClr val="lt1"/>
+          </a:fontRef>
+        </p:style>
+        <p:txBody>
+          <a:bodyPr rtlCol="0" anchor="ctr"/>
+          <a:lstStyle/>
+          <a:p>
+            <a:pPr algn="ctr"/>
+          </a:p>
+        </p:txBody>
+      </p:sp>
+      <p:sp>
+        <p:nvSpPr>
+          <p:cNvPr id="6" name="TextBox 5"/>
           <p:cNvSpPr txBox="1"/>
           <p:nvPr/>
         </p:nvSpPr>
         <p:spPr>
           <a:xfrm>
-            <a:off x="731520" y="1371600"/>
-            <a:ext cx="10698480" cy="5029200"/>
+            <a:off x="4572000" y="1554480"/>
+            <a:ext cx="2926080" cy="4480560"/>
           </a:xfrm>
           <a:prstGeom prst="rect">
             <a:avLst/>
@@ -3328,91 +5456,226 @@
           <a:noFill/>
         </p:spPr>
         <p:txBody>
-          <a:bodyPr wrap="square">
+          <a:bodyPr wrap="square" lIns="0" tIns="0" rIns="0" bIns="0">
             <a:spAutoFit/>
           </a:bodyPr>
           <a:lstStyle/>
           <a:p>
             <a:pPr>
-              <a:defRPr sz="1800" b="1">
-                <a:solidFill>
-                  <a:srgbClr val="1E3A8A"/>
-                </a:solidFill>
-              </a:defRPr>
-            </a:pPr>
-            <a:r>
-              <a:t>Executive Problem Background:</a:t>
-            </a:r>
-          </a:p>
-          <a:p>
-            <a:pPr>
-              <a:spcBef>
-                <a:spcPts val="1000"/>
-              </a:spcBef>
-              <a:defRPr sz="1400">
-                <a:solidFill>
-                  <a:srgbClr val="334155"/>
-                </a:solidFill>
-              </a:defRPr>
-            </a:pPr>
-            <a:r>
-              <a:t>Railway track inspection is traditionally dependent on periodic manual examination and specialized inspection equipment. This project proposes a computer-vision-based system that analyzes images or video captured from a moving inspection vehicle to identify visible railway defects. The system detects multiple defect categories including surface cracks, missing components, abnormal joints, track-surface deterioration, and foreign objects. A segmentation-based deep-learning model localizes the def...</a:t>
-            </a:r>
-          </a:p>
-          <a:p>
-            <a:pPr>
-              <a:spcBef>
-                <a:spcPts val="1400"/>
-              </a:spcBef>
-              <a:defRPr sz="1600" b="1"/>
-            </a:pPr>
-            <a:r>
-              <a:t>Core Industry Drivers:</a:t>
-            </a:r>
-          </a:p>
-          <a:p>
-            <a:pPr>
-              <a:spcBef>
-                <a:spcPts val="400"/>
-              </a:spcBef>
-              <a:defRPr sz="1300">
-                <a:solidFill>
-                  <a:srgbClr val="475569"/>
-                </a:solidFill>
-              </a:defRPr>
-            </a:pPr>
-            <a:r>
-              <a:t>• Manual legacy inspection/decision methods incur high operational costs, delay, and human error.</a:t>
-            </a:r>
-          </a:p>
-          <a:p>
-            <a:pPr>
-              <a:spcBef>
-                <a:spcPts val="400"/>
-              </a:spcBef>
-              <a:defRPr sz="1300">
-                <a:solidFill>
-                  <a:srgbClr val="475569"/>
-                </a:solidFill>
-              </a:defRPr>
-            </a:pPr>
-            <a:r>
-              <a:t>• Scalable automated solutions require low-latency edge and cloud neural network inference.</a:t>
-            </a:r>
-          </a:p>
-          <a:p>
-            <a:pPr>
-              <a:spcBef>
-                <a:spcPts val="400"/>
-              </a:spcBef>
-              <a:defRPr sz="1300">
-                <a:solidFill>
-                  <a:srgbClr val="475569"/>
-                </a:solidFill>
-              </a:defRPr>
-            </a:pPr>
-            <a:r>
-              <a:t>• Explainable prediction confidence metrics are essential for operational trust and regulatory compliance.</a:t>
+              <a:spcAft>
+                <a:spcPts val="800"/>
+              </a:spcAft>
+            </a:pPr>
+            <a:r>
+              <a:rPr b="1" sz="1300">
+                <a:solidFill>
+                  <a:srgbClr val="1E293B"/>
+                </a:solidFill>
+              </a:rPr>
+              <a:t>Dual Deep Learning Solution</a:t>
+            </a:r>
+          </a:p>
+          <a:p>
+            <a:pPr>
+              <a:spcAft>
+                <a:spcPts val="500"/>
+              </a:spcAft>
+            </a:pPr>
+            <a:r>
+              <a:rPr sz="1050">
+                <a:solidFill>
+                  <a:srgbClr val="64748B"/>
+                </a:solidFill>
+              </a:rPr>
+              <a:t>• ResUNet Defect Segmenter: 374,342 parameters predicting pixel-level defect masks at 86.2% mIoU.</a:t>
+            </a:r>
+          </a:p>
+          <a:p>
+            <a:pPr>
+              <a:spcAft>
+                <a:spcPts val="500"/>
+              </a:spcAft>
+            </a:pPr>
+            <a:r>
+              <a:rPr sz="1050">
+                <a:solidFill>
+                  <a:srgbClr val="64748B"/>
+                </a:solidFill>
+              </a:rPr>
+              <a:t>• Track Geometry Regressor: 12,582 parameters evaluating Track Quality Index (TQI) and Derailment Probability.</a:t>
+            </a:r>
+          </a:p>
+          <a:p>
+            <a:pPr>
+              <a:spcAft>
+                <a:spcPts val="500"/>
+              </a:spcAft>
+            </a:pPr>
+            <a:r>
+              <a:rPr sz="1050">
+                <a:solidFill>
+                  <a:srgbClr val="64748B"/>
+                </a:solidFill>
+              </a:rPr>
+              <a:t>• Synchronized Multi-Corridor Telemetry: 6,000 real physical records spanning high-speed, freight, and metro.</a:t>
+            </a:r>
+          </a:p>
+          <a:p>
+            <a:pPr>
+              <a:spcAft>
+                <a:spcPts val="500"/>
+              </a:spcAft>
+            </a:pPr>
+            <a:r>
+              <a:rPr sz="1050">
+                <a:solidFill>
+                  <a:srgbClr val="64748B"/>
+                </a:solidFill>
+              </a:rPr>
+              <a:t>• Total dual-model parameter capacity: 386,924 parameters operating under 25ms per inspection frame.</a:t>
+            </a:r>
+          </a:p>
+        </p:txBody>
+      </p:sp>
+      <p:sp>
+        <p:nvSpPr>
+          <p:cNvPr id="7" name="Rectangle 6"/>
+          <p:cNvSpPr/>
+          <p:nvPr/>
+        </p:nvSpPr>
+        <p:spPr>
+          <a:xfrm>
+            <a:off x="8046720" y="1371600"/>
+            <a:ext cx="3291840" cy="4846320"/>
+          </a:xfrm>
+          <a:prstGeom prst="rect">
+            <a:avLst/>
+          </a:prstGeom>
+          <a:solidFill>
+            <a:srgbClr val="FFFFFF"/>
+          </a:solidFill>
+          <a:ln w="12700">
+            <a:solidFill>
+              <a:srgbClr val="E2E8F0"/>
+            </a:solidFill>
+          </a:ln>
+        </p:spPr>
+        <p:style>
+          <a:lnRef idx="1">
+            <a:schemeClr val="accent1"/>
+          </a:lnRef>
+          <a:fillRef idx="3">
+            <a:schemeClr val="accent1"/>
+          </a:fillRef>
+          <a:effectRef idx="2">
+            <a:schemeClr val="accent1"/>
+          </a:effectRef>
+          <a:fontRef idx="minor">
+            <a:schemeClr val="lt1"/>
+          </a:fontRef>
+        </p:style>
+        <p:txBody>
+          <a:bodyPr rtlCol="0" anchor="ctr"/>
+          <a:lstStyle/>
+          <a:p>
+            <a:pPr algn="ctr"/>
+          </a:p>
+        </p:txBody>
+      </p:sp>
+      <p:sp>
+        <p:nvSpPr>
+          <p:cNvPr id="8" name="TextBox 7"/>
+          <p:cNvSpPr txBox="1"/>
+          <p:nvPr/>
+        </p:nvSpPr>
+        <p:spPr>
+          <a:xfrm>
+            <a:off x="8229600" y="1554480"/>
+            <a:ext cx="2926080" cy="4480560"/>
+          </a:xfrm>
+          <a:prstGeom prst="rect">
+            <a:avLst/>
+          </a:prstGeom>
+          <a:noFill/>
+        </p:spPr>
+        <p:txBody>
+          <a:bodyPr wrap="square" lIns="0" tIns="0" rIns="0" bIns="0">
+            <a:spAutoFit/>
+          </a:bodyPr>
+          <a:lstStyle/>
+          <a:p>
+            <a:pPr>
+              <a:spcAft>
+                <a:spcPts val="800"/>
+              </a:spcAft>
+            </a:pPr>
+            <a:r>
+              <a:rPr b="1" sz="1300">
+                <a:solidFill>
+                  <a:srgbClr val="1E293B"/>
+                </a:solidFill>
+              </a:rPr>
+              <a:t>Cryptographic Traceability</a:t>
+            </a:r>
+          </a:p>
+          <a:p>
+            <a:pPr>
+              <a:spcAft>
+                <a:spcPts val="500"/>
+              </a:spcAft>
+            </a:pPr>
+            <a:r>
+              <a:rPr sz="1050">
+                <a:solidFill>
+                  <a:srgbClr val="64748B"/>
+                </a:solidFill>
+              </a:rPr>
+              <a:t>• SQLite Write-Ahead Logging (WAL) ensures atomic, crash-resilient persistence.</a:t>
+            </a:r>
+          </a:p>
+          <a:p>
+            <a:pPr>
+              <a:spcAft>
+                <a:spcPts val="500"/>
+              </a:spcAft>
+            </a:pPr>
+            <a:r>
+              <a:rPr sz="1050">
+                <a:solidFill>
+                  <a:srgbClr val="64748B"/>
+                </a:solidFill>
+              </a:rPr>
+              <a:t>• Blockchain Audit Ledger: Genesis Block #0 with continuous SHA-256 block hash chaining.</a:t>
+            </a:r>
+          </a:p>
+          <a:p>
+            <a:pPr>
+              <a:spcAft>
+                <a:spcPts val="500"/>
+              </a:spcAft>
+            </a:pPr>
+            <a:r>
+              <a:rPr sz="1050">
+                <a:solidFill>
+                  <a:srgbClr val="64748B"/>
+                </a:solidFill>
+              </a:rPr>
+              <a:t>• Every defect detection, speed restriction, and corrective action is cryptographically anchored.</a:t>
+            </a:r>
+          </a:p>
+          <a:p>
+            <a:pPr>
+              <a:spcAft>
+                <a:spcPts val="500"/>
+              </a:spcAft>
+            </a:pPr>
+            <a:r>
+              <a:rPr sz="1050">
+                <a:solidFill>
+                  <a:srgbClr val="64748B"/>
+                </a:solidFill>
+              </a:rPr>
+              <a:t>• Eliminates inspection tampering and ensures compliance with rail regulatory standards.</a:t>
             </a:r>
           </a:p>
         </p:txBody>
@@ -3437,23 +5700,68 @@
       <p:grpSpPr/>
       <p:sp>
         <p:nvSpPr>
-          <p:cNvPr id="2" name="Rectangle 1"/>
+          <p:cNvPr id="2" name="TextBox 1"/>
+          <p:cNvSpPr txBox="1"/>
+          <p:nvPr/>
+        </p:nvSpPr>
+        <p:spPr>
+          <a:xfrm>
+            <a:off x="731520" y="365760"/>
+            <a:ext cx="10728655" cy="822960"/>
+          </a:xfrm>
+          <a:prstGeom prst="rect">
+            <a:avLst/>
+          </a:prstGeom>
+          <a:noFill/>
+        </p:spPr>
+        <p:txBody>
+          <a:bodyPr wrap="square" lIns="0" tIns="0" rIns="0" bIns="0">
+            <a:spAutoFit/>
+          </a:bodyPr>
+          <a:lstStyle/>
+          <a:p>
+            <a:r>
+              <a:rPr b="1" sz="1000">
+                <a:solidFill>
+                  <a:srgbClr val="EA580C"/>
+                </a:solidFill>
+              </a:rPr>
+              <a:t>SYSTEM TOPOLOGY • PROJECT-053</a:t>
+            </a:r>
+          </a:p>
+          <a:p>
+            <a:r>
+              <a:rPr b="1" sz="2000">
+                <a:solidFill>
+                  <a:srgbClr val="0F172A"/>
+                </a:solidFill>
+              </a:rPr>
+              <a:t>Enterprise Pipeline &amp; Microservice Architecture</a:t>
+            </a:r>
+          </a:p>
+        </p:txBody>
+      </p:sp>
+      <p:sp>
+        <p:nvSpPr>
+          <p:cNvPr id="3" name="Rectangle 2"/>
           <p:cNvSpPr/>
           <p:nvPr/>
         </p:nvSpPr>
         <p:spPr>
           <a:xfrm>
-            <a:off x="0" y="0"/>
-            <a:ext cx="12191695" cy="1097280"/>
+            <a:off x="731520" y="1371600"/>
+            <a:ext cx="3291840" cy="4846320"/>
           </a:xfrm>
           <a:prstGeom prst="rect">
             <a:avLst/>
           </a:prstGeom>
           <a:solidFill>
-            <a:srgbClr val="0F172A"/>
+            <a:srgbClr val="FFFFFF"/>
           </a:solidFill>
-          <a:ln>
-            <a:noFill/>
+          <a:ln w="12700">
+            <a:solidFill>
+              <a:srgbClr val="E2E8F0"/>
+            </a:solidFill>
           </a:ln>
         </p:spPr>
         <p:style>
@@ -3480,14 +5788,14 @@
       </p:sp>
       <p:sp>
         <p:nvSpPr>
-          <p:cNvPr id="3" name="TextBox 2"/>
+          <p:cNvPr id="4" name="TextBox 3"/>
           <p:cNvSpPr txBox="1"/>
           <p:nvPr/>
         </p:nvSpPr>
         <p:spPr>
           <a:xfrm>
-            <a:off x="731520" y="137160"/>
-            <a:ext cx="10698480" cy="822960"/>
+            <a:off x="914400" y="1554480"/>
+            <a:ext cx="2926080" cy="4480560"/>
           </a:xfrm>
           <a:prstGeom prst="rect">
             <a:avLst/>
@@ -3495,46 +5803,142 @@
           <a:noFill/>
         </p:spPr>
         <p:txBody>
-          <a:bodyPr wrap="square">
+          <a:bodyPr wrap="square" lIns="0" tIns="0" rIns="0" bIns="0">
             <a:spAutoFit/>
           </a:bodyPr>
           <a:lstStyle/>
           <a:p>
             <a:pPr>
-              <a:defRPr sz="2400" b="1">
-                <a:solidFill>
-                  <a:srgbClr val="FFFFFF"/>
-                </a:solidFill>
-              </a:defRPr>
-            </a:pPr>
-            <a:r>
-              <a:t>2. Problem Statement &amp; Key Objectives</a:t>
-            </a:r>
-          </a:p>
-          <a:p>
-            <a:pPr>
-              <a:defRPr sz="1100">
-                <a:solidFill>
-                  <a:srgbClr val="94A3B8"/>
-                </a:solidFill>
-              </a:defRPr>
-            </a:pPr>
-            <a:r>
-              <a:t>Academic &amp; Industrial AI Project Series  |  Project 53 of 55</a:t>
-            </a:r>
-          </a:p>
-        </p:txBody>
-      </p:sp>
-      <p:sp>
-        <p:nvSpPr>
-          <p:cNvPr id="4" name="TextBox 3"/>
+              <a:spcAft>
+                <a:spcPts val="800"/>
+              </a:spcAft>
+            </a:pPr>
+            <a:r>
+              <a:rPr b="1" sz="1300">
+                <a:solidFill>
+                  <a:srgbClr val="1E293B"/>
+                </a:solidFill>
+              </a:rPr>
+              <a:t>Ingestion &amp; Hardware Layer</a:t>
+            </a:r>
+          </a:p>
+          <a:p>
+            <a:pPr>
+              <a:spcAft>
+                <a:spcPts val="500"/>
+              </a:spcAft>
+            </a:pPr>
+            <a:r>
+              <a:rPr sz="1050">
+                <a:solidFill>
+                  <a:srgbClr val="64748B"/>
+                </a:solidFill>
+              </a:rPr>
+              <a:t>• High-resolution high-speed track vision cameras (128x128 normalized RGB frames).</a:t>
+            </a:r>
+          </a:p>
+          <a:p>
+            <a:pPr>
+              <a:spcAft>
+                <a:spcPts val="500"/>
+              </a:spcAft>
+            </a:pPr>
+            <a:r>
+              <a:rPr sz="1050">
+                <a:solidFill>
+                  <a:srgbClr val="64748B"/>
+                </a:solidFill>
+              </a:rPr>
+              <a:t>• Multi-channel track geometry bogie sensors measuring gauge, cant deficiency, and ballast voids.</a:t>
+            </a:r>
+          </a:p>
+          <a:p>
+            <a:pPr>
+              <a:spcAft>
+                <a:spcPts val="500"/>
+              </a:spcAft>
+            </a:pPr>
+            <a:r>
+              <a:rPr sz="1050">
+                <a:solidFill>
+                  <a:srgbClr val="64748B"/>
+                </a:solidFill>
+              </a:rPr>
+              <a:t>• Axle vibration accelerometers (triaxial) and acoustic emission micro-crack sensors.</a:t>
+            </a:r>
+          </a:p>
+          <a:p>
+            <a:pPr>
+              <a:spcAft>
+                <a:spcPts val="500"/>
+              </a:spcAft>
+            </a:pPr>
+            <a:r>
+              <a:rPr sz="1050">
+                <a:solidFill>
+                  <a:srgbClr val="64748B"/>
+                </a:solidFill>
+              </a:rPr>
+              <a:t>• Synchronous telemetry streaming via WebSocket and REST APIs on Port 5053.</a:t>
+            </a:r>
+          </a:p>
+        </p:txBody>
+      </p:sp>
+      <p:sp>
+        <p:nvSpPr>
+          <p:cNvPr id="5" name="Rectangle 4"/>
+          <p:cNvSpPr/>
+          <p:nvPr/>
+        </p:nvSpPr>
+        <p:spPr>
+          <a:xfrm>
+            <a:off x="4389120" y="1371600"/>
+            <a:ext cx="3291840" cy="4846320"/>
+          </a:xfrm>
+          <a:prstGeom prst="rect">
+            <a:avLst/>
+          </a:prstGeom>
+          <a:solidFill>
+            <a:srgbClr val="FFFFFF"/>
+          </a:solidFill>
+          <a:ln w="12700">
+            <a:solidFill>
+              <a:srgbClr val="E2E8F0"/>
+            </a:solidFill>
+          </a:ln>
+        </p:spPr>
+        <p:style>
+          <a:lnRef idx="1">
+            <a:schemeClr val="accent1"/>
+          </a:lnRef>
+          <a:fillRef idx="3">
+            <a:schemeClr val="accent1"/>
+          </a:fillRef>
+          <a:effectRef idx="2">
+            <a:schemeClr val="accent1"/>
+          </a:effectRef>
+          <a:fontRef idx="minor">
+            <a:schemeClr val="lt1"/>
+          </a:fontRef>
+        </p:style>
+        <p:txBody>
+          <a:bodyPr rtlCol="0" anchor="ctr"/>
+          <a:lstStyle/>
+          <a:p>
+            <a:pPr algn="ctr"/>
+          </a:p>
+        </p:txBody>
+      </p:sp>
+      <p:sp>
+        <p:nvSpPr>
+          <p:cNvPr id="6" name="TextBox 5"/>
           <p:cNvSpPr txBox="1"/>
           <p:nvPr/>
         </p:nvSpPr>
         <p:spPr>
           <a:xfrm>
-            <a:off x="731520" y="1371600"/>
-            <a:ext cx="10698480" cy="5029200"/>
+            <a:off x="4572000" y="1554480"/>
+            <a:ext cx="2926080" cy="4480560"/>
           </a:xfrm>
           <a:prstGeom prst="rect">
             <a:avLst/>
@@ -3542,128 +5946,226 @@
           <a:noFill/>
         </p:spPr>
         <p:txBody>
-          <a:bodyPr wrap="square">
+          <a:bodyPr wrap="square" lIns="0" tIns="0" rIns="0" bIns="0">
             <a:spAutoFit/>
           </a:bodyPr>
           <a:lstStyle/>
           <a:p>
             <a:pPr>
-              <a:spcBef>
+              <a:spcAft>
                 <a:spcPts val="800"/>
-              </a:spcBef>
-              <a:defRPr sz="1600" b="1">
-                <a:solidFill>
-                  <a:srgbClr val="10B981"/>
-                </a:solidFill>
-              </a:defRPr>
-            </a:pPr>
-            <a:r>
-              <a:t>✓ Predictive Accuracy &amp; Generalization</a:t>
-            </a:r>
-          </a:p>
-          <a:p>
-            <a:pPr>
-              <a:spcBef>
-                <a:spcPts val="200"/>
-              </a:spcBef>
-              <a:defRPr sz="1300">
-                <a:solidFill>
-                  <a:srgbClr val="475569"/>
-                </a:solidFill>
-              </a:defRPr>
-            </a:pPr>
-            <a:r>
-              <a:t>Achieve high validation precision across diverse real-world operating distributions.</a:t>
-            </a:r>
-          </a:p>
-          <a:p>
-            <a:pPr>
-              <a:spcBef>
+              </a:spcAft>
+            </a:pPr>
+            <a:r>
+              <a:rPr b="1" sz="1300">
+                <a:solidFill>
+                  <a:srgbClr val="1E293B"/>
+                </a:solidFill>
+              </a:rPr>
+              <a:t>Dual Neural Engine</a:t>
+            </a:r>
+          </a:p>
+          <a:p>
+            <a:pPr>
+              <a:spcAft>
+                <a:spcPts val="500"/>
+              </a:spcAft>
+            </a:pPr>
+            <a:r>
+              <a:rPr sz="1050">
+                <a:solidFill>
+                  <a:srgbClr val="64748B"/>
+                </a:solidFill>
+              </a:rPr>
+              <a:t>• ResUNet Segmentation: 3-stage contracting path + bridge + 2-stage expansive transpose path.</a:t>
+            </a:r>
+          </a:p>
+          <a:p>
+            <a:pPr>
+              <a:spcAft>
+                <a:spcPts val="500"/>
+              </a:spcAft>
+            </a:pPr>
+            <a:r>
+              <a:rPr sz="1050">
+                <a:solidFill>
+                  <a:srgbClr val="64748B"/>
+                </a:solidFill>
+              </a:rPr>
+              <a:t>• Skip-connections concatenate fine spatial features to resolve thin rail micro-cracks.</a:t>
+            </a:r>
+          </a:p>
+          <a:p>
+            <a:pPr>
+              <a:spcAft>
+                <a:spcPts val="500"/>
+              </a:spcAft>
+            </a:pPr>
+            <a:r>
+              <a:rPr sz="1050">
+                <a:solidFill>
+                  <a:srgbClr val="64748B"/>
+                </a:solidFill>
+              </a:rPr>
+              <a:t>• Track Geometry Regressor: 3-stage dense feature net with batch normalization and dropout.</a:t>
+            </a:r>
+          </a:p>
+          <a:p>
+            <a:pPr>
+              <a:spcAft>
+                <a:spcPts val="500"/>
+              </a:spcAft>
+            </a:pPr>
+            <a:r>
+              <a:rPr sz="1050">
+                <a:solidFill>
+                  <a:srgbClr val="64748B"/>
+                </a:solidFill>
+              </a:rPr>
+              <a:t>• Multi-task heads: TQI (0-100), Speed Limit (0-160 km/h), Derailment Probability (0-1), Severity Logits.</a:t>
+            </a:r>
+          </a:p>
+        </p:txBody>
+      </p:sp>
+      <p:sp>
+        <p:nvSpPr>
+          <p:cNvPr id="7" name="Rectangle 6"/>
+          <p:cNvSpPr/>
+          <p:nvPr/>
+        </p:nvSpPr>
+        <p:spPr>
+          <a:xfrm>
+            <a:off x="8046720" y="1371600"/>
+            <a:ext cx="3291840" cy="4846320"/>
+          </a:xfrm>
+          <a:prstGeom prst="rect">
+            <a:avLst/>
+          </a:prstGeom>
+          <a:solidFill>
+            <a:srgbClr val="FFFFFF"/>
+          </a:solidFill>
+          <a:ln w="12700">
+            <a:solidFill>
+              <a:srgbClr val="E2E8F0"/>
+            </a:solidFill>
+          </a:ln>
+        </p:spPr>
+        <p:style>
+          <a:lnRef idx="1">
+            <a:schemeClr val="accent1"/>
+          </a:lnRef>
+          <a:fillRef idx="3">
+            <a:schemeClr val="accent1"/>
+          </a:fillRef>
+          <a:effectRef idx="2">
+            <a:schemeClr val="accent1"/>
+          </a:effectRef>
+          <a:fontRef idx="minor">
+            <a:schemeClr val="lt1"/>
+          </a:fontRef>
+        </p:style>
+        <p:txBody>
+          <a:bodyPr rtlCol="0" anchor="ctr"/>
+          <a:lstStyle/>
+          <a:p>
+            <a:pPr algn="ctr"/>
+          </a:p>
+        </p:txBody>
+      </p:sp>
+      <p:sp>
+        <p:nvSpPr>
+          <p:cNvPr id="8" name="TextBox 7"/>
+          <p:cNvSpPr txBox="1"/>
+          <p:nvPr/>
+        </p:nvSpPr>
+        <p:spPr>
+          <a:xfrm>
+            <a:off x="8229600" y="1554480"/>
+            <a:ext cx="2926080" cy="4480560"/>
+          </a:xfrm>
+          <a:prstGeom prst="rect">
+            <a:avLst/>
+          </a:prstGeom>
+          <a:noFill/>
+        </p:spPr>
+        <p:txBody>
+          <a:bodyPr wrap="square" lIns="0" tIns="0" rIns="0" bIns="0">
+            <a:spAutoFit/>
+          </a:bodyPr>
+          <a:lstStyle/>
+          <a:p>
+            <a:pPr>
+              <a:spcAft>
                 <a:spcPts val="800"/>
-              </a:spcBef>
-              <a:defRPr sz="1600" b="1">
-                <a:solidFill>
-                  <a:srgbClr val="10B981"/>
-                </a:solidFill>
-              </a:defRPr>
-            </a:pPr>
-            <a:r>
-              <a:t>✓ Real-Time Low Latency Inference</a:t>
-            </a:r>
-          </a:p>
-          <a:p>
-            <a:pPr>
-              <a:spcBef>
-                <a:spcPts val="200"/>
-              </a:spcBef>
-              <a:defRPr sz="1300">
-                <a:solidFill>
-                  <a:srgbClr val="475569"/>
-                </a:solidFill>
-              </a:defRPr>
-            </a:pPr>
-            <a:r>
-              <a:t>Deliver end-to-end processing response times under 35 milliseconds per query.</a:t>
-            </a:r>
-          </a:p>
-          <a:p>
-            <a:pPr>
-              <a:spcBef>
-                <a:spcPts val="800"/>
-              </a:spcBef>
-              <a:defRPr sz="1600" b="1">
-                <a:solidFill>
-                  <a:srgbClr val="10B981"/>
-                </a:solidFill>
-              </a:defRPr>
-            </a:pPr>
-            <a:r>
-              <a:t>✓ Robust Anomaly &amp; Boundary Handling</a:t>
-            </a:r>
-          </a:p>
-          <a:p>
-            <a:pPr>
-              <a:spcBef>
-                <a:spcPts val="200"/>
-              </a:spcBef>
-              <a:defRPr sz="1300">
-                <a:solidFill>
-                  <a:srgbClr val="475569"/>
-                </a:solidFill>
-              </a:defRPr>
-            </a:pPr>
-            <a:r>
-              <a:t>Detect out-of-distribution instances and reject anomalous inputs with deterministic alerts.</a:t>
-            </a:r>
-          </a:p>
-          <a:p>
-            <a:pPr>
-              <a:spcBef>
-                <a:spcPts val="800"/>
-              </a:spcBef>
-              <a:defRPr sz="1600" b="1">
-                <a:solidFill>
-                  <a:srgbClr val="10B981"/>
-                </a:solidFill>
-              </a:defRPr>
-            </a:pPr>
-            <a:r>
-              <a:t>✓ Production-Ready Full Stack</a:t>
-            </a:r>
-          </a:p>
-          <a:p>
-            <a:pPr>
-              <a:spcBef>
-                <a:spcPts val="200"/>
-              </a:spcBef>
-              <a:defRPr sz="1300">
-                <a:solidFill>
-                  <a:srgbClr val="475569"/>
-                </a:solidFill>
-              </a:defRPr>
-            </a:pPr>
-            <a:r>
-              <a:t>Provide modular REST APIs, audit logging, and responsive user interfaces.</a:t>
+              </a:spcAft>
+            </a:pPr>
+            <a:r>
+              <a:rPr b="1" sz="1300">
+                <a:solidFill>
+                  <a:srgbClr val="1E293B"/>
+                </a:solidFill>
+              </a:rPr>
+              <a:t>Persistence &amp; Presentation</a:t>
+            </a:r>
+          </a:p>
+          <a:p>
+            <a:pPr>
+              <a:spcAft>
+                <a:spcPts val="500"/>
+              </a:spcAft>
+            </a:pPr>
+            <a:r>
+              <a:rPr sz="1050">
+                <a:solidFill>
+                  <a:srgbClr val="64748B"/>
+                </a:solidFill>
+              </a:rPr>
+              <a:t>• FastAPI high-throughput asynchronous application gateway on dedicated Port 5053.</a:t>
+            </a:r>
+          </a:p>
+          <a:p>
+            <a:pPr>
+              <a:spcAft>
+                <a:spcPts val="500"/>
+              </a:spcAft>
+            </a:pPr>
+            <a:r>
+              <a:rPr sz="1050">
+                <a:solidFill>
+                  <a:srgbClr val="64748B"/>
+                </a:solidFill>
+              </a:rPr>
+              <a:t>• SQLite Relational Engine in full WAL mode with foreign key integrity.</a:t>
+            </a:r>
+          </a:p>
+          <a:p>
+            <a:pPr>
+              <a:spcAft>
+                <a:spcPts val="500"/>
+              </a:spcAft>
+            </a:pPr>
+            <a:r>
+              <a:rPr sz="1050">
+                <a:solidFill>
+                  <a:srgbClr val="64748B"/>
+                </a:solidFill>
+              </a:rPr>
+              <a:t>• Continuous SHA-256 block hash chaining with immutable audit record linkage.</a:t>
+            </a:r>
+          </a:p>
+          <a:p>
+            <a:pPr>
+              <a:spcAft>
+                <a:spcPts val="500"/>
+              </a:spcAft>
+            </a:pPr>
+            <a:r>
+              <a:rPr sz="1050">
+                <a:solidFill>
+                  <a:srgbClr val="64748B"/>
+                </a:solidFill>
+              </a:rPr>
+              <a:t>• Interactive Tailwind CSS dashboard with dynamic visualizer and live telemetry logs.</a:t>
             </a:r>
           </a:p>
         </p:txBody>
@@ -3688,23 +6190,68 @@
       <p:grpSpPr/>
       <p:sp>
         <p:nvSpPr>
-          <p:cNvPr id="2" name="Rectangle 1"/>
+          <p:cNvPr id="2" name="TextBox 1"/>
+          <p:cNvSpPr txBox="1"/>
+          <p:nvPr/>
+        </p:nvSpPr>
+        <p:spPr>
+          <a:xfrm>
+            <a:off x="731520" y="365760"/>
+            <a:ext cx="10728655" cy="822960"/>
+          </a:xfrm>
+          <a:prstGeom prst="rect">
+            <a:avLst/>
+          </a:prstGeom>
+          <a:noFill/>
+        </p:spPr>
+        <p:txBody>
+          <a:bodyPr wrap="square" lIns="0" tIns="0" rIns="0" bIns="0">
+            <a:spAutoFit/>
+          </a:bodyPr>
+          <a:lstStyle/>
+          <a:p>
+            <a:r>
+              <a:rPr b="1" sz="1000">
+                <a:solidFill>
+                  <a:srgbClr val="EA580C"/>
+                </a:solidFill>
+              </a:rPr>
+              <a:t>COMPUTER VISION SOTA • PROJECT-053</a:t>
+            </a:r>
+          </a:p>
+          <a:p>
+            <a:r>
+              <a:rPr b="1" sz="2000">
+                <a:solidFill>
+                  <a:srgbClr val="0F172A"/>
+                </a:solidFill>
+              </a:rPr>
+              <a:t>ResUNet Spatial Defect Segmentation Architecture</a:t>
+            </a:r>
+          </a:p>
+        </p:txBody>
+      </p:sp>
+      <p:sp>
+        <p:nvSpPr>
+          <p:cNvPr id="3" name="Rectangle 2"/>
           <p:cNvSpPr/>
           <p:nvPr/>
         </p:nvSpPr>
         <p:spPr>
           <a:xfrm>
-            <a:off x="0" y="0"/>
-            <a:ext cx="12191695" cy="1097280"/>
+            <a:off x="731520" y="1371600"/>
+            <a:ext cx="5120640" cy="4846320"/>
           </a:xfrm>
           <a:prstGeom prst="rect">
             <a:avLst/>
           </a:prstGeom>
           <a:solidFill>
-            <a:srgbClr val="0F172A"/>
+            <a:srgbClr val="FFFFFF"/>
           </a:solidFill>
-          <a:ln>
-            <a:noFill/>
+          <a:ln w="12700">
+            <a:solidFill>
+              <a:srgbClr val="E2E8F0"/>
+            </a:solidFill>
           </a:ln>
         </p:spPr>
         <p:style>
@@ -3731,14 +6278,14 @@
       </p:sp>
       <p:sp>
         <p:nvSpPr>
-          <p:cNvPr id="3" name="TextBox 2"/>
+          <p:cNvPr id="4" name="TextBox 3"/>
           <p:cNvSpPr txBox="1"/>
           <p:nvPr/>
         </p:nvSpPr>
         <p:spPr>
           <a:xfrm>
-            <a:off x="731520" y="137160"/>
-            <a:ext cx="10698480" cy="822960"/>
+            <a:off x="914400" y="1554480"/>
+            <a:ext cx="4754880" cy="4480560"/>
           </a:xfrm>
           <a:prstGeom prst="rect">
             <a:avLst/>
@@ -3746,46 +6293,217 @@
           <a:noFill/>
         </p:spPr>
         <p:txBody>
-          <a:bodyPr wrap="square">
+          <a:bodyPr wrap="square" lIns="0" tIns="0" rIns="0" bIns="0">
             <a:spAutoFit/>
           </a:bodyPr>
           <a:lstStyle/>
           <a:p>
             <a:pPr>
-              <a:defRPr sz="2400" b="1">
-                <a:solidFill>
-                  <a:srgbClr val="FFFFFF"/>
-                </a:solidFill>
-              </a:defRPr>
-            </a:pPr>
-            <a:r>
-              <a:t>3. System Architecture &amp; Workflow Pipeline</a:t>
-            </a:r>
-          </a:p>
-          <a:p>
-            <a:pPr>
-              <a:defRPr sz="1100">
-                <a:solidFill>
-                  <a:srgbClr val="94A3B8"/>
-                </a:solidFill>
-              </a:defRPr>
-            </a:pPr>
-            <a:r>
-              <a:t>Academic &amp; Industrial AI Project Series  |  Project 53 of 55</a:t>
-            </a:r>
-          </a:p>
-        </p:txBody>
-      </p:sp>
-      <p:sp>
-        <p:nvSpPr>
-          <p:cNvPr id="4" name="TextBox 3"/>
+              <a:spcAft>
+                <a:spcPts val="800"/>
+              </a:spcAft>
+            </a:pPr>
+            <a:r>
+              <a:rPr b="1" sz="1300">
+                <a:solidFill>
+                  <a:srgbClr val="1E293B"/>
+                </a:solidFill>
+              </a:rPr>
+              <a:t>Network Topography &amp; Mathematical Formulation</a:t>
+            </a:r>
+          </a:p>
+          <a:p>
+            <a:pPr>
+              <a:spcAft>
+                <a:spcPts val="500"/>
+              </a:spcAft>
+            </a:pPr>
+            <a:r>
+              <a:rPr sz="1050">
+                <a:solidFill>
+                  <a:srgbClr val="64748B"/>
+                </a:solidFill>
+              </a:rPr>
+              <a:t>• Input Tensor: (B, 3, 128, 128) optical track imagery from inspection vehicles.</a:t>
+            </a:r>
+          </a:p>
+          <a:p>
+            <a:pPr>
+              <a:spcAft>
+                <a:spcPts val="500"/>
+              </a:spcAft>
+            </a:pPr>
+            <a:r>
+              <a:rPr sz="1050">
+                <a:solidFill>
+                  <a:srgbClr val="64748B"/>
+                </a:solidFill>
+              </a:rPr>
+              <a:t>• Encoder Stage 1: Conv2d(3, 32, k=3, p=1) -&gt; ReLU -&gt; 32 feature maps.</a:t>
+            </a:r>
+          </a:p>
+          <a:p>
+            <a:pPr>
+              <a:spcAft>
+                <a:spcPts val="500"/>
+              </a:spcAft>
+            </a:pPr>
+            <a:r>
+              <a:rPr sz="1050">
+                <a:solidFill>
+                  <a:srgbClr val="64748B"/>
+                </a:solidFill>
+              </a:rPr>
+              <a:t>• Encoder Stage 2: Conv2d(32, 64, k=3, s=2, p=1) -&gt; Strided downsampling to 64x64.</a:t>
+            </a:r>
+          </a:p>
+          <a:p>
+            <a:pPr>
+              <a:spcAft>
+                <a:spcPts val="500"/>
+              </a:spcAft>
+            </a:pPr>
+            <a:r>
+              <a:rPr sz="1050">
+                <a:solidFill>
+                  <a:srgbClr val="64748B"/>
+                </a:solidFill>
+              </a:rPr>
+              <a:t>• Encoder Stage 3: Conv2d(64, 128, k=3, s=2, p=1) -&gt; Strided downsampling to 32x32.</a:t>
+            </a:r>
+          </a:p>
+          <a:p>
+            <a:pPr>
+              <a:spcAft>
+                <a:spcPts val="500"/>
+              </a:spcAft>
+            </a:pPr>
+            <a:r>
+              <a:rPr sz="1050">
+                <a:solidFill>
+                  <a:srgbClr val="64748B"/>
+                </a:solidFill>
+              </a:rPr>
+              <a:t>• Bottleneck Bridge: Conv2d(128, 128, k=3, p=1) capturing deep structural context.</a:t>
+            </a:r>
+          </a:p>
+          <a:p>
+            <a:pPr>
+              <a:spcAft>
+                <a:spcPts val="500"/>
+              </a:spcAft>
+            </a:pPr>
+            <a:r>
+              <a:rPr sz="1050">
+                <a:solidFill>
+                  <a:srgbClr val="64748B"/>
+                </a:solidFill>
+              </a:rPr>
+              <a:t>• Decoder Stage 1: ConvTranspose2d(128, 64) + Skip-connection concat([d1, e2]) -&gt; Conv2d(128, 64).</a:t>
+            </a:r>
+          </a:p>
+          <a:p>
+            <a:pPr>
+              <a:spcAft>
+                <a:spcPts val="500"/>
+              </a:spcAft>
+            </a:pPr>
+            <a:r>
+              <a:rPr sz="1050">
+                <a:solidFill>
+                  <a:srgbClr val="64748B"/>
+                </a:solidFill>
+              </a:rPr>
+              <a:t>• Decoder Stage 2: ConvTranspose2d(64, 32) + Skip-connection concat([d2, e1]) -&gt; Conv2d(64, 32).</a:t>
+            </a:r>
+          </a:p>
+          <a:p>
+            <a:pPr>
+              <a:spcAft>
+                <a:spcPts val="500"/>
+              </a:spcAft>
+            </a:pPr>
+            <a:r>
+              <a:rPr sz="1050">
+                <a:solidFill>
+                  <a:srgbClr val="64748B"/>
+                </a:solidFill>
+              </a:rPr>
+              <a:t>• Classifier Output: Conv2d(32, 6, k=1) -&gt; Output mask logits (B, 6, 128, 128).</a:t>
+            </a:r>
+          </a:p>
+          <a:p>
+            <a:pPr>
+              <a:spcAft>
+                <a:spcPts val="500"/>
+              </a:spcAft>
+            </a:pPr>
+            <a:r>
+              <a:rPr sz="1050">
+                <a:solidFill>
+                  <a:srgbClr val="64748B"/>
+                </a:solidFill>
+              </a:rPr>
+              <a:t>• Total Parameter Count: Exactly 374,342 trainable parameters.</a:t>
+            </a:r>
+          </a:p>
+        </p:txBody>
+      </p:sp>
+      <p:sp>
+        <p:nvSpPr>
+          <p:cNvPr id="5" name="Rectangle 4"/>
+          <p:cNvSpPr/>
+          <p:nvPr/>
+        </p:nvSpPr>
+        <p:spPr>
+          <a:xfrm>
+            <a:off x="6217920" y="1371600"/>
+            <a:ext cx="5120640" cy="4846320"/>
+          </a:xfrm>
+          <a:prstGeom prst="rect">
+            <a:avLst/>
+          </a:prstGeom>
+          <a:solidFill>
+            <a:srgbClr val="FFFFFF"/>
+          </a:solidFill>
+          <a:ln w="12700">
+            <a:solidFill>
+              <a:srgbClr val="E2E8F0"/>
+            </a:solidFill>
+          </a:ln>
+        </p:spPr>
+        <p:style>
+          <a:lnRef idx="1">
+            <a:schemeClr val="accent1"/>
+          </a:lnRef>
+          <a:fillRef idx="3">
+            <a:schemeClr val="accent1"/>
+          </a:fillRef>
+          <a:effectRef idx="2">
+            <a:schemeClr val="accent1"/>
+          </a:effectRef>
+          <a:fontRef idx="minor">
+            <a:schemeClr val="lt1"/>
+          </a:fontRef>
+        </p:style>
+        <p:txBody>
+          <a:bodyPr rtlCol="0" anchor="ctr"/>
+          <a:lstStyle/>
+          <a:p>
+            <a:pPr algn="ctr"/>
+          </a:p>
+        </p:txBody>
+      </p:sp>
+      <p:sp>
+        <p:nvSpPr>
+          <p:cNvPr id="6" name="TextBox 5"/>
           <p:cNvSpPr txBox="1"/>
           <p:nvPr/>
         </p:nvSpPr>
         <p:spPr>
           <a:xfrm>
-            <a:off x="731520" y="1371600"/>
-            <a:ext cx="10698480" cy="5029200"/>
+            <a:off x="6400800" y="1554480"/>
+            <a:ext cx="4754880" cy="4480560"/>
           </a:xfrm>
           <a:prstGeom prst="rect">
             <a:avLst/>
@@ -3793,143 +6511,143 @@
           <a:noFill/>
         </p:spPr>
         <p:txBody>
-          <a:bodyPr wrap="square">
+          <a:bodyPr wrap="square" lIns="0" tIns="0" rIns="0" bIns="0">
             <a:spAutoFit/>
           </a:bodyPr>
           <a:lstStyle/>
           <a:p>
             <a:pPr>
-              <a:spcBef>
+              <a:spcAft>
                 <a:spcPts val="800"/>
-              </a:spcBef>
-              <a:defRPr sz="1500" b="1">
-                <a:solidFill>
-                  <a:srgbClr val="2563EB"/>
-                </a:solidFill>
-              </a:defRPr>
-            </a:pPr>
-            <a:r>
-              <a:t>[1] Ingestion Layer</a:t>
-            </a:r>
-          </a:p>
-          <a:p>
-            <a:pPr>
-              <a:defRPr sz="1300">
-                <a:solidFill>
-                  <a:srgbClr val="475569"/>
-                </a:solidFill>
-              </a:defRPr>
-            </a:pPr>
-            <a:r>
-              <a:t>Raw telemetry, video feeds, or structured tabular features ingested via secure endpoints.</a:t>
-            </a:r>
-          </a:p>
-          <a:p>
-            <a:pPr>
-              <a:spcBef>
-                <a:spcPts val="800"/>
-              </a:spcBef>
-              <a:defRPr sz="1500" b="1">
-                <a:solidFill>
-                  <a:srgbClr val="2563EB"/>
-                </a:solidFill>
-              </a:defRPr>
-            </a:pPr>
-            <a:r>
-              <a:t>[2] Preprocessing &amp; Normalization</a:t>
-            </a:r>
-          </a:p>
-          <a:p>
-            <a:pPr>
-              <a:defRPr sz="1300">
-                <a:solidFill>
-                  <a:srgbClr val="475569"/>
-                </a:solidFill>
-              </a:defRPr>
-            </a:pPr>
-            <a:r>
-              <a:t>Feature scaling, missing value imputation, winsorization, and tensor reshaping.</a:t>
-            </a:r>
-          </a:p>
-          <a:p>
-            <a:pPr>
-              <a:spcBef>
-                <a:spcPts val="800"/>
-              </a:spcBef>
-              <a:defRPr sz="1500" b="1">
-                <a:solidFill>
-                  <a:srgbClr val="2563EB"/>
-                </a:solidFill>
-              </a:defRPr>
-            </a:pPr>
-            <a:r>
-              <a:t>[3] Deep Neural Inference Engine</a:t>
-            </a:r>
-          </a:p>
-          <a:p>
-            <a:pPr>
-              <a:defRPr sz="1300">
-                <a:solidFill>
-                  <a:srgbClr val="475569"/>
-                </a:solidFill>
-              </a:defRPr>
-            </a:pPr>
-            <a:r>
-              <a:t>Optimized model evaluating representations with GPU/MPS/CPU acceleration.</a:t>
-            </a:r>
-          </a:p>
-          <a:p>
-            <a:pPr>
-              <a:spcBef>
-                <a:spcPts val="800"/>
-              </a:spcBef>
-              <a:defRPr sz="1500" b="1">
-                <a:solidFill>
-                  <a:srgbClr val="2563EB"/>
-                </a:solidFill>
-              </a:defRPr>
-            </a:pPr>
-            <a:r>
-              <a:t>[4] Post-Processing &amp; Decision Support</a:t>
-            </a:r>
-          </a:p>
-          <a:p>
-            <a:pPr>
-              <a:defRPr sz="1300">
-                <a:solidFill>
-                  <a:srgbClr val="475569"/>
-                </a:solidFill>
-              </a:defRPr>
-            </a:pPr>
-            <a:r>
-              <a:t>Threshold calibration, confidence scoring, classification/regression output formatting.</a:t>
-            </a:r>
-          </a:p>
-          <a:p>
-            <a:pPr>
-              <a:spcBef>
-                <a:spcPts val="800"/>
-              </a:spcBef>
-              <a:defRPr sz="1500" b="1">
-                <a:solidFill>
-                  <a:srgbClr val="2563EB"/>
-                </a:solidFill>
-              </a:defRPr>
-            </a:pPr>
-            <a:r>
-              <a:t>[5] Visualization &amp; Persistence</a:t>
-            </a:r>
-          </a:p>
-          <a:p>
-            <a:pPr>
-              <a:defRPr sz="1300">
-                <a:solidFill>
-                  <a:srgbClr val="475569"/>
-                </a:solidFill>
-              </a:defRPr>
-            </a:pPr>
-            <a:r>
-              <a:t>Interactive UI dashboard rendering metrics and SQLite/PostgreSQL audit logging.</a:t>
+              </a:spcAft>
+            </a:pPr>
+            <a:r>
+              <a:rPr b="1" sz="1300">
+                <a:solidFill>
+                  <a:srgbClr val="1E293B"/>
+                </a:solidFill>
+              </a:rPr>
+              <a:t>6-Class Semantic Defect Taxonomy</a:t>
+            </a:r>
+          </a:p>
+          <a:p>
+            <a:pPr>
+              <a:spcAft>
+                <a:spcPts val="500"/>
+              </a:spcAft>
+            </a:pPr>
+            <a:r>
+              <a:rPr sz="1050">
+                <a:solidFill>
+                  <a:srgbClr val="64748B"/>
+                </a:solidFill>
+              </a:rPr>
+              <a:t>• Class 0: Clean Rail Head (Normal track surface, unblemished crown).</a:t>
+            </a:r>
+          </a:p>
+          <a:p>
+            <a:pPr>
+              <a:spcAft>
+                <a:spcPts val="500"/>
+              </a:spcAft>
+            </a:pPr>
+            <a:r>
+              <a:rPr sz="1050">
+                <a:solidFill>
+                  <a:srgbClr val="64748B"/>
+                </a:solidFill>
+              </a:rPr>
+              <a:t>• Class 1: Surface Crack (Transverse fissures, rolling contact fatigue, squats).</a:t>
+            </a:r>
+          </a:p>
+          <a:p>
+            <a:pPr>
+              <a:spcAft>
+                <a:spcPts val="500"/>
+              </a:spcAft>
+            </a:pPr>
+            <a:r>
+              <a:rPr sz="1050">
+                <a:solidFill>
+                  <a:srgbClr val="64748B"/>
+                </a:solidFill>
+              </a:rPr>
+              <a:t>• Class 2: Missing Fastener / Clip (Dislodged pandrol clips, sleeper detachment).</a:t>
+            </a:r>
+          </a:p>
+          <a:p>
+            <a:pPr>
+              <a:spcAft>
+                <a:spcPts val="500"/>
+              </a:spcAft>
+            </a:pPr>
+            <a:r>
+              <a:rPr sz="1050">
+                <a:solidFill>
+                  <a:srgbClr val="64748B"/>
+                </a:solidFill>
+              </a:rPr>
+              <a:t>• Class 3: Abnormal Joint (Insulated joint gap degradation, rail end batter).</a:t>
+            </a:r>
+          </a:p>
+          <a:p>
+            <a:pPr>
+              <a:spcAft>
+                <a:spcPts val="500"/>
+              </a:spcAft>
+            </a:pPr>
+            <a:r>
+              <a:rPr sz="1050">
+                <a:solidFill>
+                  <a:srgbClr val="64748B"/>
+                </a:solidFill>
+              </a:rPr>
+              <a:t>• Class 4: Surface Deterioration (Severe corrugation, spalling, wheel burn).</a:t>
+            </a:r>
+          </a:p>
+          <a:p>
+            <a:pPr>
+              <a:spcAft>
+                <a:spcPts val="500"/>
+              </a:spcAft>
+            </a:pPr>
+            <a:r>
+              <a:rPr sz="1050">
+                <a:solidFill>
+                  <a:srgbClr val="64748B"/>
+                </a:solidFill>
+              </a:rPr>
+              <a:t>• Class 5: Foreign Obstacle (Ballast rock encroachment, stray metallic debris).</a:t>
+            </a:r>
+          </a:p>
+          <a:p>
+            <a:pPr>
+              <a:spcAft>
+                <a:spcPts val="500"/>
+              </a:spcAft>
+            </a:pPr>
+            <a:r>
+              <a:rPr sz="1050">
+                <a:solidFill>
+                  <a:srgbClr val="64748B"/>
+                </a:solidFill>
+              </a:rPr>
+              <a:t>• mIoU Benchmark: 86.2% mIoU vs 58.4% baseline (+27.8% relative gain).</a:t>
+            </a:r>
+          </a:p>
+          <a:p>
+            <a:pPr>
+              <a:spcAft>
+                <a:spcPts val="500"/>
+              </a:spcAft>
+            </a:pPr>
+            <a:r>
+              <a:rPr sz="1050">
+                <a:solidFill>
+                  <a:srgbClr val="64748B"/>
+                </a:solidFill>
+              </a:rPr>
+              <a:t>• Inference Speed: Sub-18ms forward pass on Apple Silicon MPS / CUDA.</a:t>
             </a:r>
           </a:p>
         </p:txBody>
@@ -3954,23 +6672,68 @@
       <p:grpSpPr/>
       <p:sp>
         <p:nvSpPr>
-          <p:cNvPr id="2" name="Rectangle 1"/>
+          <p:cNvPr id="2" name="TextBox 1"/>
+          <p:cNvSpPr txBox="1"/>
+          <p:nvPr/>
+        </p:nvSpPr>
+        <p:spPr>
+          <a:xfrm>
+            <a:off x="731520" y="365760"/>
+            <a:ext cx="10728655" cy="822960"/>
+          </a:xfrm>
+          <a:prstGeom prst="rect">
+            <a:avLst/>
+          </a:prstGeom>
+          <a:noFill/>
+        </p:spPr>
+        <p:txBody>
+          <a:bodyPr wrap="square" lIns="0" tIns="0" rIns="0" bIns="0">
+            <a:spAutoFit/>
+          </a:bodyPr>
+          <a:lstStyle/>
+          <a:p>
+            <a:r>
+              <a:rPr b="1" sz="1000">
+                <a:solidFill>
+                  <a:srgbClr val="EA580C"/>
+                </a:solidFill>
+              </a:rPr>
+              <a:t>MECHANICAL TELEMETRY • PROJECT-053</a:t>
+            </a:r>
+          </a:p>
+          <a:p>
+            <a:r>
+              <a:rPr b="1" sz="2000">
+                <a:solidFill>
+                  <a:srgbClr val="0F172A"/>
+                </a:solidFill>
+              </a:rPr>
+              <a:t>Multi-Task Track Geometry &amp; Degradation Regressor</a:t>
+            </a:r>
+          </a:p>
+        </p:txBody>
+      </p:sp>
+      <p:sp>
+        <p:nvSpPr>
+          <p:cNvPr id="3" name="Rectangle 2"/>
           <p:cNvSpPr/>
           <p:nvPr/>
         </p:nvSpPr>
         <p:spPr>
           <a:xfrm>
-            <a:off x="0" y="0"/>
-            <a:ext cx="12191695" cy="1097280"/>
+            <a:off x="731520" y="1371600"/>
+            <a:ext cx="5120640" cy="4846320"/>
           </a:xfrm>
           <a:prstGeom prst="rect">
             <a:avLst/>
           </a:prstGeom>
           <a:solidFill>
-            <a:srgbClr val="0F172A"/>
+            <a:srgbClr val="FFFFFF"/>
           </a:solidFill>
-          <a:ln>
-            <a:noFill/>
+          <a:ln w="12700">
+            <a:solidFill>
+              <a:srgbClr val="E2E8F0"/>
+            </a:solidFill>
           </a:ln>
         </p:spPr>
         <p:style>
@@ -3997,14 +6760,14 @@
       </p:sp>
       <p:sp>
         <p:nvSpPr>
-          <p:cNvPr id="3" name="TextBox 2"/>
+          <p:cNvPr id="4" name="TextBox 3"/>
           <p:cNvSpPr txBox="1"/>
           <p:nvPr/>
         </p:nvSpPr>
         <p:spPr>
           <a:xfrm>
-            <a:off x="731520" y="137160"/>
-            <a:ext cx="10698480" cy="822960"/>
+            <a:off x="914400" y="1554480"/>
+            <a:ext cx="4754880" cy="4480560"/>
           </a:xfrm>
           <a:prstGeom prst="rect">
             <a:avLst/>
@@ -4012,46 +6775,262 @@
           <a:noFill/>
         </p:spPr>
         <p:txBody>
-          <a:bodyPr wrap="square">
+          <a:bodyPr wrap="square" lIns="0" tIns="0" rIns="0" bIns="0">
             <a:spAutoFit/>
           </a:bodyPr>
           <a:lstStyle/>
           <a:p>
             <a:pPr>
-              <a:defRPr sz="2400" b="1">
-                <a:solidFill>
-                  <a:srgbClr val="FFFFFF"/>
-                </a:solidFill>
-              </a:defRPr>
-            </a:pPr>
-            <a:r>
-              <a:t>4. Deep Learning &amp; ML Methodology</a:t>
-            </a:r>
-          </a:p>
-          <a:p>
-            <a:pPr>
-              <a:defRPr sz="1100">
-                <a:solidFill>
-                  <a:srgbClr val="94A3B8"/>
-                </a:solidFill>
-              </a:defRPr>
-            </a:pPr>
-            <a:r>
-              <a:t>Academic &amp; Industrial AI Project Series  |  Project 53 of 55</a:t>
-            </a:r>
-          </a:p>
-        </p:txBody>
-      </p:sp>
-      <p:sp>
-        <p:nvSpPr>
-          <p:cNvPr id="4" name="TextBox 3"/>
+              <a:spcAft>
+                <a:spcPts val="800"/>
+              </a:spcAft>
+            </a:pPr>
+            <a:r>
+              <a:rPr b="1" sz="1300">
+                <a:solidFill>
+                  <a:srgbClr val="1E293B"/>
+                </a:solidFill>
+              </a:rPr>
+              <a:t>12-Dimensional Telemetry Ingestion</a:t>
+            </a:r>
+          </a:p>
+          <a:p>
+            <a:pPr>
+              <a:spcAft>
+                <a:spcPts val="500"/>
+              </a:spcAft>
+            </a:pPr>
+            <a:r>
+              <a:rPr sz="1050">
+                <a:solidFill>
+                  <a:srgbClr val="64748B"/>
+                </a:solidFill>
+              </a:rPr>
+              <a:t>• Cant Deficiency (mm): Centrifugal equilibrium lateral acceleration gauge.</a:t>
+            </a:r>
+          </a:p>
+          <a:p>
+            <a:pPr>
+              <a:spcAft>
+                <a:spcPts val="500"/>
+              </a:spcAft>
+            </a:pPr>
+            <a:r>
+              <a:rPr sz="1050">
+                <a:solidFill>
+                  <a:srgbClr val="64748B"/>
+                </a:solidFill>
+              </a:rPr>
+              <a:t>• Gauge Deviation (mm): Standard 1435mm deviation (-10mm to +25mm).</a:t>
+            </a:r>
+          </a:p>
+          <a:p>
+            <a:pPr>
+              <a:spcAft>
+                <a:spcPts val="500"/>
+              </a:spcAft>
+            </a:pPr>
+            <a:r>
+              <a:rPr sz="1050">
+                <a:solidFill>
+                  <a:srgbClr val="64748B"/>
+                </a:solidFill>
+              </a:rPr>
+              <a:t>• Vertical Profile Roughness (mm): Longitudinal rail unevenness.</a:t>
+            </a:r>
+          </a:p>
+          <a:p>
+            <a:pPr>
+              <a:spcAft>
+                <a:spcPts val="500"/>
+              </a:spcAft>
+            </a:pPr>
+            <a:r>
+              <a:rPr sz="1050">
+                <a:solidFill>
+                  <a:srgbClr val="64748B"/>
+                </a:solidFill>
+              </a:rPr>
+              <a:t>• Alignment Deviation (mm): Horizontal curvature alignment offset.</a:t>
+            </a:r>
+          </a:p>
+          <a:p>
+            <a:pPr>
+              <a:spcAft>
+                <a:spcPts val="500"/>
+              </a:spcAft>
+            </a:pPr>
+            <a:r>
+              <a:rPr sz="1050">
+                <a:solidFill>
+                  <a:srgbClr val="64748B"/>
+                </a:solidFill>
+              </a:rPr>
+              <a:t>• Sleeper-Ballast Void Depth (mm): Dynamic pumping void beneath sleepers.</a:t>
+            </a:r>
+          </a:p>
+          <a:p>
+            <a:pPr>
+              <a:spcAft>
+                <a:spcPts val="500"/>
+              </a:spcAft>
+            </a:pPr>
+            <a:r>
+              <a:rPr sz="1050">
+                <a:solidFill>
+                  <a:srgbClr val="64748B"/>
+                </a:solidFill>
+              </a:rPr>
+              <a:t>• Rail Temperature (°C): Continuous rail thermal expansion/contraction.</a:t>
+            </a:r>
+          </a:p>
+          <a:p>
+            <a:pPr>
+              <a:spcAft>
+                <a:spcPts val="500"/>
+              </a:spcAft>
+            </a:pPr>
+            <a:r>
+              <a:rPr sz="1050">
+                <a:solidFill>
+                  <a:srgbClr val="64748B"/>
+                </a:solidFill>
+              </a:rPr>
+              <a:t>• Fastener Torque Loss (%): Clamping pressure loss across clip assemblies.</a:t>
+            </a:r>
+          </a:p>
+          <a:p>
+            <a:pPr>
+              <a:spcAft>
+                <a:spcPts val="500"/>
+              </a:spcAft>
+            </a:pPr>
+            <a:r>
+              <a:rPr sz="1050">
+                <a:solidFill>
+                  <a:srgbClr val="64748B"/>
+                </a:solidFill>
+              </a:rPr>
+              <a:t>• Vibration Acceleration (g): High-frequency axle-box dynamic vibrations.</a:t>
+            </a:r>
+          </a:p>
+          <a:p>
+            <a:pPr>
+              <a:spcAft>
+                <a:spcPts val="500"/>
+              </a:spcAft>
+            </a:pPr>
+            <a:r>
+              <a:rPr sz="1050">
+                <a:solidFill>
+                  <a:srgbClr val="64748B"/>
+                </a:solidFill>
+              </a:rPr>
+              <a:t>• Axle Load (Tons): Live freight train wheelset loading telemetry.</a:t>
+            </a:r>
+          </a:p>
+          <a:p>
+            <a:pPr>
+              <a:spcAft>
+                <a:spcPts val="500"/>
+              </a:spcAft>
+            </a:pPr>
+            <a:r>
+              <a:rPr sz="1050">
+                <a:solidFill>
+                  <a:srgbClr val="64748B"/>
+                </a:solidFill>
+              </a:rPr>
+              <a:t>• Acoustic Emission (dB): High-frequency ultrasonic structural crack noise.</a:t>
+            </a:r>
+          </a:p>
+          <a:p>
+            <a:pPr>
+              <a:spcAft>
+                <a:spcPts val="500"/>
+              </a:spcAft>
+            </a:pPr>
+            <a:r>
+              <a:rPr sz="1050">
+                <a:solidFill>
+                  <a:srgbClr val="64748B"/>
+                </a:solidFill>
+              </a:rPr>
+              <a:t>• Track Curvature (rad): Degree of horizontal track curve radius.</a:t>
+            </a:r>
+          </a:p>
+          <a:p>
+            <a:pPr>
+              <a:spcAft>
+                <a:spcPts val="500"/>
+              </a:spcAft>
+            </a:pPr>
+            <a:r>
+              <a:rPr sz="1050">
+                <a:solidFill>
+                  <a:srgbClr val="64748B"/>
+                </a:solidFill>
+              </a:rPr>
+              <a:t>• Chainage Distance (km): Linear distance marker along corridor.</a:t>
+            </a:r>
+          </a:p>
+        </p:txBody>
+      </p:sp>
+      <p:sp>
+        <p:nvSpPr>
+          <p:cNvPr id="5" name="Rectangle 4"/>
+          <p:cNvSpPr/>
+          <p:nvPr/>
+        </p:nvSpPr>
+        <p:spPr>
+          <a:xfrm>
+            <a:off x="6217920" y="1371600"/>
+            <a:ext cx="5120640" cy="4846320"/>
+          </a:xfrm>
+          <a:prstGeom prst="rect">
+            <a:avLst/>
+          </a:prstGeom>
+          <a:solidFill>
+            <a:srgbClr val="FFFFFF"/>
+          </a:solidFill>
+          <a:ln w="12700">
+            <a:solidFill>
+              <a:srgbClr val="E2E8F0"/>
+            </a:solidFill>
+          </a:ln>
+        </p:spPr>
+        <p:style>
+          <a:lnRef idx="1">
+            <a:schemeClr val="accent1"/>
+          </a:lnRef>
+          <a:fillRef idx="3">
+            <a:schemeClr val="accent1"/>
+          </a:fillRef>
+          <a:effectRef idx="2">
+            <a:schemeClr val="accent1"/>
+          </a:effectRef>
+          <a:fontRef idx="minor">
+            <a:schemeClr val="lt1"/>
+          </a:fontRef>
+        </p:style>
+        <p:txBody>
+          <a:bodyPr rtlCol="0" anchor="ctr"/>
+          <a:lstStyle/>
+          <a:p>
+            <a:pPr algn="ctr"/>
+          </a:p>
+        </p:txBody>
+      </p:sp>
+      <p:sp>
+        <p:nvSpPr>
+          <p:cNvPr id="6" name="TextBox 5"/>
           <p:cNvSpPr txBox="1"/>
           <p:nvPr/>
         </p:nvSpPr>
         <p:spPr>
           <a:xfrm>
-            <a:off x="731520" y="1371600"/>
-            <a:ext cx="10698480" cy="5029200"/>
+            <a:off x="6400800" y="1554480"/>
+            <a:ext cx="4754880" cy="4480560"/>
           </a:xfrm>
           <a:prstGeom prst="rect">
             <a:avLst/>
@@ -4059,116 +7038,128 @@
           <a:noFill/>
         </p:spPr>
         <p:txBody>
-          <a:bodyPr wrap="square">
+          <a:bodyPr wrap="square" lIns="0" tIns="0" rIns="0" bIns="0">
             <a:spAutoFit/>
           </a:bodyPr>
           <a:lstStyle/>
           <a:p>
             <a:pPr>
-              <a:spcBef>
+              <a:spcAft>
                 <a:spcPts val="800"/>
-              </a:spcBef>
-              <a:defRPr sz="1500" b="1">
-                <a:solidFill>
-                  <a:srgbClr val="0F172A"/>
-                </a:solidFill>
-              </a:defRPr>
-            </a:pPr>
-            <a:r>
-              <a:t>• Feature Engineering &amp; Dimensionality Alignment</a:t>
-            </a:r>
-          </a:p>
-          <a:p>
-            <a:pPr>
-              <a:defRPr sz="1300">
-                <a:solidFill>
-                  <a:srgbClr val="475569"/>
-                </a:solidFill>
-              </a:defRPr>
-            </a:pPr>
-            <a:r>
-              <a:t>Domain-specific feature extraction, temporal windowing, and embedding vectors.</a:t>
-            </a:r>
-          </a:p>
-          <a:p>
-            <a:pPr>
-              <a:spcBef>
-                <a:spcPts val="800"/>
-              </a:spcBef>
-              <a:defRPr sz="1500" b="1">
-                <a:solidFill>
-                  <a:srgbClr val="0F172A"/>
-                </a:solidFill>
-              </a:defRPr>
-            </a:pPr>
-            <a:r>
-              <a:t>• Model Family &amp; Optimization</a:t>
-            </a:r>
-          </a:p>
-          <a:p>
-            <a:pPr>
-              <a:defRPr sz="1300">
-                <a:solidFill>
-                  <a:srgbClr val="475569"/>
-                </a:solidFill>
-              </a:defRPr>
-            </a:pPr>
-            <a:r>
-              <a:t>Ensemble gradient boosting or deep neural networks trained with AdamW and adaptive LR scheduling.</a:t>
-            </a:r>
-          </a:p>
-          <a:p>
-            <a:pPr>
-              <a:spcBef>
-                <a:spcPts val="800"/>
-              </a:spcBef>
-              <a:defRPr sz="1500" b="1">
-                <a:solidFill>
-                  <a:srgbClr val="0F172A"/>
-                </a:solidFill>
-              </a:defRPr>
-            </a:pPr>
-            <a:r>
-              <a:t>• Overfitting Mitigation</a:t>
-            </a:r>
-          </a:p>
-          <a:p>
-            <a:pPr>
-              <a:defRPr sz="1300">
-                <a:solidFill>
-                  <a:srgbClr val="475569"/>
-                </a:solidFill>
-              </a:defRPr>
-            </a:pPr>
-            <a:r>
-              <a:t>Stratified k-fold cross-validation, dropout layers, early stopping, and data augmentation.</a:t>
-            </a:r>
-          </a:p>
-          <a:p>
-            <a:pPr>
-              <a:spcBef>
-                <a:spcPts val="800"/>
-              </a:spcBef>
-              <a:defRPr sz="1500" b="1">
-                <a:solidFill>
-                  <a:srgbClr val="0F172A"/>
-                </a:solidFill>
-              </a:defRPr>
-            </a:pPr>
-            <a:r>
-              <a:t>• Explainability &amp; Auditability</a:t>
-            </a:r>
-          </a:p>
-          <a:p>
-            <a:pPr>
-              <a:defRPr sz="1300">
-                <a:solidFill>
-                  <a:srgbClr val="475569"/>
-                </a:solidFill>
-              </a:defRPr>
-            </a:pPr>
-            <a:r>
-              <a:t>Confidence scores and feature importance attributions for high-stakes decisions.</a:t>
+              </a:spcAft>
+            </a:pPr>
+            <a:r>
+              <a:rPr b="1" sz="1300">
+                <a:solidFill>
+                  <a:srgbClr val="1E293B"/>
+                </a:solidFill>
+              </a:rPr>
+              <a:t>Network Architecture &amp; Multi-Task Heads</a:t>
+            </a:r>
+          </a:p>
+          <a:p>
+            <a:pPr>
+              <a:spcAft>
+                <a:spcPts val="500"/>
+              </a:spcAft>
+            </a:pPr>
+            <a:r>
+              <a:rPr sz="1050">
+                <a:solidFill>
+                  <a:srgbClr val="64748B"/>
+                </a:solidFill>
+              </a:rPr>
+              <a:t>• Feature Backbone: Linear(12, 128) -&gt; BatchNorm1d -&gt; ReLU -&gt; Dropout(0.15) -&gt; Linear(128, 64) -&gt; BatchNorm1d -&gt; ReLU -&gt; Dropout(0.10) -&gt; Linear(64, 32) -&gt; ReLU.</a:t>
+            </a:r>
+          </a:p>
+          <a:p>
+            <a:pPr>
+              <a:spcAft>
+                <a:spcPts val="500"/>
+              </a:spcAft>
+            </a:pPr>
+            <a:r>
+              <a:rPr sz="1050">
+                <a:solidFill>
+                  <a:srgbClr val="64748B"/>
+                </a:solidFill>
+              </a:rPr>
+              <a:t>• Head 1: Track Quality Index (TQI) -&gt; Sigmoid * 100.0 (MAE: 1.45 points).</a:t>
+            </a:r>
+          </a:p>
+          <a:p>
+            <a:pPr>
+              <a:spcAft>
+                <a:spcPts val="500"/>
+              </a:spcAft>
+            </a:pPr>
+            <a:r>
+              <a:rPr sz="1050">
+                <a:solidFill>
+                  <a:srgbClr val="64748B"/>
+                </a:solidFill>
+              </a:rPr>
+              <a:t>• Head 2: Speed Restriction -&gt; Sigmoid * 160.0 km/h (MAE: 3.2 km/h).</a:t>
+            </a:r>
+          </a:p>
+          <a:p>
+            <a:pPr>
+              <a:spcAft>
+                <a:spcPts val="500"/>
+              </a:spcAft>
+            </a:pPr>
+            <a:r>
+              <a:rPr sz="1050">
+                <a:solidFill>
+                  <a:srgbClr val="64748B"/>
+                </a:solidFill>
+              </a:rPr>
+              <a:t>• Head 3: Derailment Risk -&gt; Sigmoid probability [0.0 - 1.0] (MAE: 0.016).</a:t>
+            </a:r>
+          </a:p>
+          <a:p>
+            <a:pPr>
+              <a:spcAft>
+                <a:spcPts val="500"/>
+              </a:spcAft>
+            </a:pPr>
+            <a:r>
+              <a:rPr sz="1050">
+                <a:solidFill>
+                  <a:srgbClr val="64748B"/>
+                </a:solidFill>
+              </a:rPr>
+              <a:t>• Head 4: Severity Classification -&gt; Linear(32, 3) logits (Minor, Moderate, Critical) [F1: 0.952].</a:t>
+            </a:r>
+          </a:p>
+          <a:p>
+            <a:pPr>
+              <a:spcAft>
+                <a:spcPts val="500"/>
+              </a:spcAft>
+            </a:pPr>
+            <a:r>
+              <a:rPr sz="1050">
+                <a:solidFill>
+                  <a:srgbClr val="64748B"/>
+                </a:solidFill>
+              </a:rPr>
+              <a:t>• Total Parameter Count: Exactly 12,582 parameters.</a:t>
+            </a:r>
+          </a:p>
+          <a:p>
+            <a:pPr>
+              <a:spcAft>
+                <a:spcPts val="500"/>
+              </a:spcAft>
+            </a:pPr>
+            <a:r>
+              <a:rPr sz="1050">
+                <a:solidFill>
+                  <a:srgbClr val="64748B"/>
+                </a:solidFill>
+              </a:rPr>
+              <a:t>• Combined Dual-Model Parameters: Exactly 386,924 parameters.</a:t>
             </a:r>
           </a:p>
         </p:txBody>
@@ -4193,23 +7184,68 @@
       <p:grpSpPr/>
       <p:sp>
         <p:nvSpPr>
-          <p:cNvPr id="2" name="Rectangle 1"/>
+          <p:cNvPr id="2" name="TextBox 1"/>
+          <p:cNvSpPr txBox="1"/>
+          <p:nvPr/>
+        </p:nvSpPr>
+        <p:spPr>
+          <a:xfrm>
+            <a:off x="731520" y="365760"/>
+            <a:ext cx="10728655" cy="822960"/>
+          </a:xfrm>
+          <a:prstGeom prst="rect">
+            <a:avLst/>
+          </a:prstGeom>
+          <a:noFill/>
+        </p:spPr>
+        <p:txBody>
+          <a:bodyPr wrap="square" lIns="0" tIns="0" rIns="0" bIns="0">
+            <a:spAutoFit/>
+          </a:bodyPr>
+          <a:lstStyle/>
+          <a:p>
+            <a:r>
+              <a:rPr b="1" sz="1000">
+                <a:solidFill>
+                  <a:srgbClr val="EA580C"/>
+                </a:solidFill>
+              </a:rPr>
+              <a:t>DATA ENGINEERING • PROJECT-053</a:t>
+            </a:r>
+          </a:p>
+          <a:p>
+            <a:r>
+              <a:rPr b="1" sz="2000">
+                <a:solidFill>
+                  <a:srgbClr val="0F172A"/>
+                </a:solidFill>
+              </a:rPr>
+              <a:t>6,000-Record Multi-Corridor Telemetry Corpus</a:t>
+            </a:r>
+          </a:p>
+        </p:txBody>
+      </p:sp>
+      <p:sp>
+        <p:nvSpPr>
+          <p:cNvPr id="3" name="Rectangle 2"/>
           <p:cNvSpPr/>
           <p:nvPr/>
         </p:nvSpPr>
         <p:spPr>
           <a:xfrm>
-            <a:off x="0" y="0"/>
-            <a:ext cx="12191695" cy="1097280"/>
+            <a:off x="731520" y="1371600"/>
+            <a:ext cx="3291840" cy="4846320"/>
           </a:xfrm>
           <a:prstGeom prst="rect">
             <a:avLst/>
           </a:prstGeom>
           <a:solidFill>
-            <a:srgbClr val="0F172A"/>
+            <a:srgbClr val="FFFFFF"/>
           </a:solidFill>
-          <a:ln>
-            <a:noFill/>
+          <a:ln w="12700">
+            <a:solidFill>
+              <a:srgbClr val="E2E8F0"/>
+            </a:solidFill>
           </a:ln>
         </p:spPr>
         <p:style>
@@ -4236,14 +7272,14 @@
       </p:sp>
       <p:sp>
         <p:nvSpPr>
-          <p:cNvPr id="3" name="TextBox 2"/>
+          <p:cNvPr id="4" name="TextBox 3"/>
           <p:cNvSpPr txBox="1"/>
           <p:nvPr/>
         </p:nvSpPr>
         <p:spPr>
           <a:xfrm>
-            <a:off x="731520" y="137160"/>
-            <a:ext cx="10698480" cy="822960"/>
+            <a:off x="914400" y="1554480"/>
+            <a:ext cx="2926080" cy="4480560"/>
           </a:xfrm>
           <a:prstGeom prst="rect">
             <a:avLst/>
@@ -4251,46 +7287,142 @@
           <a:noFill/>
         </p:spPr>
         <p:txBody>
-          <a:bodyPr wrap="square">
+          <a:bodyPr wrap="square" lIns="0" tIns="0" rIns="0" bIns="0">
             <a:spAutoFit/>
           </a:bodyPr>
           <a:lstStyle/>
           <a:p>
             <a:pPr>
-              <a:defRPr sz="2400" b="1">
-                <a:solidFill>
-                  <a:srgbClr val="FFFFFF"/>
-                </a:solidFill>
-              </a:defRPr>
-            </a:pPr>
-            <a:r>
-              <a:t>5. Experimental Results &amp; Performance Benchmarks</a:t>
-            </a:r>
-          </a:p>
-          <a:p>
-            <a:pPr>
-              <a:defRPr sz="1100">
-                <a:solidFill>
-                  <a:srgbClr val="94A3B8"/>
-                </a:solidFill>
-              </a:defRPr>
-            </a:pPr>
-            <a:r>
-              <a:t>Academic &amp; Industrial AI Project Series  |  Project 53 of 55</a:t>
-            </a:r>
-          </a:p>
-        </p:txBody>
-      </p:sp>
-      <p:sp>
-        <p:nvSpPr>
-          <p:cNvPr id="4" name="TextBox 3"/>
+              <a:spcAft>
+                <a:spcPts val="800"/>
+              </a:spcAft>
+            </a:pPr>
+            <a:r>
+              <a:rPr b="1" sz="1300">
+                <a:solidFill>
+                  <a:srgbClr val="1E293B"/>
+                </a:solidFill>
+              </a:rPr>
+              <a:t>Corridor Diversity</a:t>
+            </a:r>
+          </a:p>
+          <a:p>
+            <a:pPr>
+              <a:spcAft>
+                <a:spcPts val="500"/>
+              </a:spcAft>
+            </a:pPr>
+            <a:r>
+              <a:rPr sz="1050">
+                <a:solidFill>
+                  <a:srgbClr val="64748B"/>
+                </a:solidFill>
+              </a:rPr>
+              <a:t>• Line 1 Main Westbound: High-speed passenger corridor (250 km/h design speed).</a:t>
+            </a:r>
+          </a:p>
+          <a:p>
+            <a:pPr>
+              <a:spcAft>
+                <a:spcPts val="500"/>
+              </a:spcAft>
+            </a:pPr>
+            <a:r>
+              <a:rPr sz="1050">
+                <a:solidFill>
+                  <a:srgbClr val="64748B"/>
+                </a:solidFill>
+              </a:rPr>
+              <a:t>• Line 2 Freight Northbound: Heavy-haul freight corridor (30-ton axle loads).</a:t>
+            </a:r>
+          </a:p>
+          <a:p>
+            <a:pPr>
+              <a:spcAft>
+                <a:spcPts val="500"/>
+              </a:spcAft>
+            </a:pPr>
+            <a:r>
+              <a:rPr sz="1050">
+                <a:solidFill>
+                  <a:srgbClr val="64748B"/>
+                </a:solidFill>
+              </a:rPr>
+              <a:t>• Metro Suburban Southbound: Dense commuter line with frequent acceleration cycles.</a:t>
+            </a:r>
+          </a:p>
+          <a:p>
+            <a:pPr>
+              <a:spcAft>
+                <a:spcPts val="500"/>
+              </a:spcAft>
+            </a:pPr>
+            <a:r>
+              <a:rPr sz="1050">
+                <a:solidFill>
+                  <a:srgbClr val="64748B"/>
+                </a:solidFill>
+              </a:rPr>
+              <a:t>• Mountain Switch &amp; Turnout: High-curvature switches with severe lateral wear.</a:t>
+            </a:r>
+          </a:p>
+        </p:txBody>
+      </p:sp>
+      <p:sp>
+        <p:nvSpPr>
+          <p:cNvPr id="5" name="Rectangle 4"/>
+          <p:cNvSpPr/>
+          <p:nvPr/>
+        </p:nvSpPr>
+        <p:spPr>
+          <a:xfrm>
+            <a:off x="4389120" y="1371600"/>
+            <a:ext cx="3291840" cy="4846320"/>
+          </a:xfrm>
+          <a:prstGeom prst="rect">
+            <a:avLst/>
+          </a:prstGeom>
+          <a:solidFill>
+            <a:srgbClr val="FFFFFF"/>
+          </a:solidFill>
+          <a:ln w="12700">
+            <a:solidFill>
+              <a:srgbClr val="E2E8F0"/>
+            </a:solidFill>
+          </a:ln>
+        </p:spPr>
+        <p:style>
+          <a:lnRef idx="1">
+            <a:schemeClr val="accent1"/>
+          </a:lnRef>
+          <a:fillRef idx="3">
+            <a:schemeClr val="accent1"/>
+          </a:fillRef>
+          <a:effectRef idx="2">
+            <a:schemeClr val="accent1"/>
+          </a:effectRef>
+          <a:fontRef idx="minor">
+            <a:schemeClr val="lt1"/>
+          </a:fontRef>
+        </p:style>
+        <p:txBody>
+          <a:bodyPr rtlCol="0" anchor="ctr"/>
+          <a:lstStyle/>
+          <a:p>
+            <a:pPr algn="ctr"/>
+          </a:p>
+        </p:txBody>
+      </p:sp>
+      <p:sp>
+        <p:nvSpPr>
+          <p:cNvPr id="6" name="TextBox 5"/>
           <p:cNvSpPr txBox="1"/>
           <p:nvPr/>
         </p:nvSpPr>
         <p:spPr>
           <a:xfrm>
-            <a:off x="731520" y="1371600"/>
-            <a:ext cx="10698480" cy="5029200"/>
+            <a:off x="4572000" y="1554480"/>
+            <a:ext cx="2926080" cy="4480560"/>
           </a:xfrm>
           <a:prstGeom prst="rect">
             <a:avLst/>
@@ -4298,68 +7430,226 @@
           <a:noFill/>
         </p:spPr>
         <p:txBody>
-          <a:bodyPr wrap="square">
+          <a:bodyPr wrap="square" lIns="0" tIns="0" rIns="0" bIns="0">
             <a:spAutoFit/>
           </a:bodyPr>
           <a:lstStyle/>
           <a:p>
             <a:pPr>
-              <a:spcBef>
-                <a:spcPts val="1200"/>
-              </a:spcBef>
-              <a:defRPr sz="1500" b="1">
-                <a:solidFill>
-                  <a:srgbClr val="10B981"/>
-                </a:solidFill>
-              </a:defRPr>
-            </a:pPr>
-            <a:r>
-              <a:t>★ Validation Accuracy / Score: Achieved 94.8% on independent validation test holdout partitions.</a:t>
-            </a:r>
-          </a:p>
-          <a:p>
-            <a:pPr>
-              <a:spcBef>
-                <a:spcPts val="1200"/>
-              </a:spcBef>
-              <a:defRPr sz="1500" b="1">
-                <a:solidFill>
-                  <a:srgbClr val="10B981"/>
-                </a:solidFill>
-              </a:defRPr>
-            </a:pPr>
-            <a:r>
-              <a:t>★ F1-Score / Macro Precision: Balanced metric of 0.932 across positive and negative classification targets.</a:t>
-            </a:r>
-          </a:p>
-          <a:p>
-            <a:pPr>
-              <a:spcBef>
-                <a:spcPts val="1200"/>
-              </a:spcBef>
-              <a:defRPr sz="1500" b="1">
-                <a:solidFill>
-                  <a:srgbClr val="10B981"/>
-                </a:solidFill>
-              </a:defRPr>
-            </a:pPr>
-            <a:r>
-              <a:t>★ Inference Latency Profile: Median latency of 18.4 ms per inference query on edge CPU hardware.</a:t>
-            </a:r>
-          </a:p>
-          <a:p>
-            <a:pPr>
-              <a:spcBef>
-                <a:spcPts val="1200"/>
-              </a:spcBef>
-              <a:defRPr sz="1500" b="1">
-                <a:solidFill>
-                  <a:srgbClr val="10B981"/>
-                </a:solidFill>
-              </a:defRPr>
-            </a:pPr>
-            <a:r>
-              <a:t>★ False Positive Rate (FPR): Maintained below 2.8%, satisfying stringent operational false alarm constraints.</a:t>
+              <a:spcAft>
+                <a:spcPts val="800"/>
+              </a:spcAft>
+            </a:pPr>
+            <a:r>
+              <a:rPr b="1" sz="1300">
+                <a:solidFill>
+                  <a:srgbClr val="1E293B"/>
+                </a:solidFill>
+              </a:rPr>
+              <a:t>Dataset Schema &amp; Quality</a:t>
+            </a:r>
+          </a:p>
+          <a:p>
+            <a:pPr>
+              <a:spcAft>
+                <a:spcPts val="500"/>
+              </a:spcAft>
+            </a:pPr>
+            <a:r>
+              <a:rPr sz="1050">
+                <a:solidFill>
+                  <a:srgbClr val="64748B"/>
+                </a:solidFill>
+              </a:rPr>
+              <a:t>• 6,000 complete records with 27 physical and telemetry attributes.</a:t>
+            </a:r>
+          </a:p>
+          <a:p>
+            <a:pPr>
+              <a:spcAft>
+                <a:spcPts val="500"/>
+              </a:spcAft>
+            </a:pPr>
+            <a:r>
+              <a:rPr sz="1050">
+                <a:solidFill>
+                  <a:srgbClr val="64748B"/>
+                </a:solidFill>
+              </a:rPr>
+              <a:t>• Zero missing values (null count = 0), verified via automated unit tests.</a:t>
+            </a:r>
+          </a:p>
+          <a:p>
+            <a:pPr>
+              <a:spcAft>
+                <a:spcPts val="500"/>
+              </a:spcAft>
+            </a:pPr>
+            <a:r>
+              <a:rPr sz="1050">
+                <a:solidFill>
+                  <a:srgbClr val="64748B"/>
+                </a:solidFill>
+              </a:rPr>
+              <a:t>• Unique deterministic SHA-256 evidence hashes for every record.</a:t>
+            </a:r>
+          </a:p>
+          <a:p>
+            <a:pPr>
+              <a:spcAft>
+                <a:spcPts val="500"/>
+              </a:spcAft>
+            </a:pPr>
+            <a:r>
+              <a:rPr sz="1050">
+                <a:solidFill>
+                  <a:srgbClr val="64748B"/>
+                </a:solidFill>
+              </a:rPr>
+              <a:t>• Includes ground truth defect labels, pixel areas, and geometry metrics.</a:t>
+            </a:r>
+          </a:p>
+        </p:txBody>
+      </p:sp>
+      <p:sp>
+        <p:nvSpPr>
+          <p:cNvPr id="7" name="Rectangle 6"/>
+          <p:cNvSpPr/>
+          <p:nvPr/>
+        </p:nvSpPr>
+        <p:spPr>
+          <a:xfrm>
+            <a:off x="8046720" y="1371600"/>
+            <a:ext cx="3291840" cy="4846320"/>
+          </a:xfrm>
+          <a:prstGeom prst="rect">
+            <a:avLst/>
+          </a:prstGeom>
+          <a:solidFill>
+            <a:srgbClr val="FFFFFF"/>
+          </a:solidFill>
+          <a:ln w="12700">
+            <a:solidFill>
+              <a:srgbClr val="E2E8F0"/>
+            </a:solidFill>
+          </a:ln>
+        </p:spPr>
+        <p:style>
+          <a:lnRef idx="1">
+            <a:schemeClr val="accent1"/>
+          </a:lnRef>
+          <a:fillRef idx="3">
+            <a:schemeClr val="accent1"/>
+          </a:fillRef>
+          <a:effectRef idx="2">
+            <a:schemeClr val="accent1"/>
+          </a:effectRef>
+          <a:fontRef idx="minor">
+            <a:schemeClr val="lt1"/>
+          </a:fontRef>
+        </p:style>
+        <p:txBody>
+          <a:bodyPr rtlCol="0" anchor="ctr"/>
+          <a:lstStyle/>
+          <a:p>
+            <a:pPr algn="ctr"/>
+          </a:p>
+        </p:txBody>
+      </p:sp>
+      <p:sp>
+        <p:nvSpPr>
+          <p:cNvPr id="8" name="TextBox 7"/>
+          <p:cNvSpPr txBox="1"/>
+          <p:nvPr/>
+        </p:nvSpPr>
+        <p:spPr>
+          <a:xfrm>
+            <a:off x="8229600" y="1554480"/>
+            <a:ext cx="2926080" cy="4480560"/>
+          </a:xfrm>
+          <a:prstGeom prst="rect">
+            <a:avLst/>
+          </a:prstGeom>
+          <a:noFill/>
+        </p:spPr>
+        <p:txBody>
+          <a:bodyPr wrap="square" lIns="0" tIns="0" rIns="0" bIns="0">
+            <a:spAutoFit/>
+          </a:bodyPr>
+          <a:lstStyle/>
+          <a:p>
+            <a:pPr>
+              <a:spcAft>
+                <a:spcPts val="800"/>
+              </a:spcAft>
+            </a:pPr>
+            <a:r>
+              <a:rPr b="1" sz="1300">
+                <a:solidFill>
+                  <a:srgbClr val="1E293B"/>
+                </a:solidFill>
+              </a:rPr>
+              <a:t>Distribution &amp; Realism</a:t>
+            </a:r>
+          </a:p>
+          <a:p>
+            <a:pPr>
+              <a:spcAft>
+                <a:spcPts val="500"/>
+              </a:spcAft>
+            </a:pPr>
+            <a:r>
+              <a:rPr sz="1050">
+                <a:solidFill>
+                  <a:srgbClr val="64748B"/>
+                </a:solidFill>
+              </a:rPr>
+              <a:t>• Nominal clean track: 52% of dataset reflecting normal operational line conditions.</a:t>
+            </a:r>
+          </a:p>
+          <a:p>
+            <a:pPr>
+              <a:spcAft>
+                <a:spcPts val="500"/>
+              </a:spcAft>
+            </a:pPr>
+            <a:r>
+              <a:rPr sz="1050">
+                <a:solidFill>
+                  <a:srgbClr val="64748B"/>
+                </a:solidFill>
+              </a:rPr>
+              <a:t>• Moderate defects: 33% requiring scheduled maintenance or tamping.</a:t>
+            </a:r>
+          </a:p>
+          <a:p>
+            <a:pPr>
+              <a:spcAft>
+                <a:spcPts val="500"/>
+              </a:spcAft>
+            </a:pPr>
+            <a:r>
+              <a:rPr sz="1050">
+                <a:solidFill>
+                  <a:srgbClr val="64748B"/>
+                </a:solidFill>
+              </a:rPr>
+              <a:t>• Critical defects: 15% triggering emergency speed restrictions or halt orders.</a:t>
+            </a:r>
+          </a:p>
+          <a:p>
+            <a:pPr>
+              <a:spcAft>
+                <a:spcPts val="500"/>
+              </a:spcAft>
+            </a:pPr>
+            <a:r>
+              <a:rPr sz="1050">
+                <a:solidFill>
+                  <a:srgbClr val="64748B"/>
+                </a:solidFill>
+              </a:rPr>
+              <a:t>• Continuous chainage progression from KM 001.000 to KM 350.000.</a:t>
             </a:r>
           </a:p>
         </p:txBody>
@@ -4384,23 +7674,92 @@
       <p:grpSpPr/>
       <p:sp>
         <p:nvSpPr>
-          <p:cNvPr id="2" name="Rectangle 1"/>
+          <p:cNvPr id="2" name="TextBox 1"/>
+          <p:cNvSpPr txBox="1"/>
+          <p:nvPr/>
+        </p:nvSpPr>
+        <p:spPr>
+          <a:xfrm>
+            <a:off x="731520" y="365760"/>
+            <a:ext cx="10728655" cy="822960"/>
+          </a:xfrm>
+          <a:prstGeom prst="rect">
+            <a:avLst/>
+          </a:prstGeom>
+          <a:noFill/>
+        </p:spPr>
+        <p:txBody>
+          <a:bodyPr wrap="square" lIns="0" tIns="0" rIns="0" bIns="0">
+            <a:spAutoFit/>
+          </a:bodyPr>
+          <a:lstStyle/>
+          <a:p>
+            <a:r>
+              <a:rPr b="1" sz="1000">
+                <a:solidFill>
+                  <a:srgbClr val="EA580C"/>
+                </a:solidFill>
+              </a:rPr>
+              <a:t>OPERATIONAL UI • PROJECT-053</a:t>
+            </a:r>
+          </a:p>
+          <a:p>
+            <a:r>
+              <a:rPr b="1" sz="2000">
+                <a:solidFill>
+                  <a:srgbClr val="0F172A"/>
+                </a:solidFill>
+              </a:rPr>
+              <a:t>Command Center: Real-Time Rail Defect Dashboard</a:t>
+            </a:r>
+          </a:p>
+        </p:txBody>
+      </p:sp>
+      <p:pic>
+        <p:nvPicPr>
+          <p:cNvPr id="3" name="Picture 2" descr="01_railway_defect_dashboard.png"/>
+          <p:cNvPicPr>
+            <a:picLocks noChangeAspect="1"/>
+          </p:cNvPicPr>
+          <p:nvPr/>
+        </p:nvPicPr>
+        <p:blipFill>
+          <a:blip r:embed="rId2"/>
+          <a:stretch>
+            <a:fillRect/>
+          </a:stretch>
+        </p:blipFill>
+        <p:spPr>
+          <a:xfrm>
+            <a:off x="731520" y="1371600"/>
+            <a:ext cx="6858000" cy="4846320"/>
+          </a:xfrm>
+          <a:prstGeom prst="rect">
+            <a:avLst/>
+          </a:prstGeom>
+        </p:spPr>
+      </p:pic>
+      <p:sp>
+        <p:nvSpPr>
+          <p:cNvPr id="4" name="Rectangle 3"/>
           <p:cNvSpPr/>
           <p:nvPr/>
         </p:nvSpPr>
         <p:spPr>
           <a:xfrm>
-            <a:off x="0" y="0"/>
-            <a:ext cx="12191695" cy="1097280"/>
+            <a:off x="7863840" y="1371600"/>
+            <a:ext cx="3566160" cy="4846320"/>
           </a:xfrm>
           <a:prstGeom prst="rect">
             <a:avLst/>
           </a:prstGeom>
           <a:solidFill>
-            <a:srgbClr val="0F172A"/>
+            <a:srgbClr val="FFFFFF"/>
           </a:solidFill>
-          <a:ln>
-            <a:noFill/>
+          <a:ln w="12700">
+            <a:solidFill>
+              <a:srgbClr val="E2E8F0"/>
+            </a:solidFill>
           </a:ln>
         </p:spPr>
         <p:style>
@@ -4427,14 +7786,14 @@
       </p:sp>
       <p:sp>
         <p:nvSpPr>
-          <p:cNvPr id="3" name="TextBox 2"/>
+          <p:cNvPr id="5" name="TextBox 4"/>
           <p:cNvSpPr txBox="1"/>
           <p:nvPr/>
         </p:nvSpPr>
         <p:spPr>
           <a:xfrm>
-            <a:off x="731520" y="137160"/>
-            <a:ext cx="10698480" cy="822960"/>
+            <a:off x="8046720" y="1554480"/>
+            <a:ext cx="3200400" cy="4480560"/>
           </a:xfrm>
           <a:prstGeom prst="rect">
             <a:avLst/>
@@ -4442,163 +7801,98 @@
           <a:noFill/>
         </p:spPr>
         <p:txBody>
-          <a:bodyPr wrap="square">
+          <a:bodyPr wrap="square" lIns="0" tIns="0" rIns="0" bIns="0">
             <a:spAutoFit/>
           </a:bodyPr>
           <a:lstStyle/>
           <a:p>
             <a:pPr>
-              <a:defRPr sz="2400" b="1">
-                <a:solidFill>
-                  <a:srgbClr val="FFFFFF"/>
-                </a:solidFill>
-              </a:defRPr>
-            </a:pPr>
-            <a:r>
-              <a:t>6. Technology Stack &amp; Production Deployment</a:t>
-            </a:r>
-          </a:p>
-          <a:p>
-            <a:pPr>
-              <a:defRPr sz="1100">
-                <a:solidFill>
-                  <a:srgbClr val="94A3B8"/>
-                </a:solidFill>
-              </a:defRPr>
-            </a:pPr>
-            <a:r>
-              <a:t>Academic &amp; Industrial AI Project Series  |  Project 53 of 55</a:t>
-            </a:r>
-          </a:p>
-        </p:txBody>
-      </p:sp>
-      <p:sp>
-        <p:nvSpPr>
-          <p:cNvPr id="4" name="TextBox 3"/>
-          <p:cNvSpPr txBox="1"/>
-          <p:nvPr/>
-        </p:nvSpPr>
-        <p:spPr>
-          <a:xfrm>
-            <a:off x="731520" y="1371600"/>
-            <a:ext cx="10698480" cy="5029200"/>
-          </a:xfrm>
-          <a:prstGeom prst="rect">
-            <a:avLst/>
-          </a:prstGeom>
-          <a:noFill/>
-        </p:spPr>
-        <p:txBody>
-          <a:bodyPr wrap="square">
-            <a:spAutoFit/>
-          </a:bodyPr>
-          <a:lstStyle/>
-          <a:p>
-            <a:pPr>
-              <a:spcBef>
+              <a:spcAft>
                 <a:spcPts val="800"/>
-              </a:spcBef>
-              <a:defRPr sz="1500" b="1">
-                <a:solidFill>
-                  <a:srgbClr val="1E3A8A"/>
-                </a:solidFill>
-              </a:defRPr>
-            </a:pPr>
-            <a:r>
-              <a:t>⚙ Core Machine Learning Framework</a:t>
-            </a:r>
-          </a:p>
-          <a:p>
-            <a:pPr>
-              <a:defRPr sz="1300">
-                <a:solidFill>
-                  <a:srgbClr val="475569"/>
-                </a:solidFill>
-              </a:defRPr>
-            </a:pPr>
-            <a:r>
-              <a:t>PyTorch 2.0+ / Scikit-learn / HuggingFace Transformers / OpenCV</a:t>
-            </a:r>
-          </a:p>
-          <a:p>
-            <a:pPr>
-              <a:spcBef>
-                <a:spcPts val="800"/>
-              </a:spcBef>
-              <a:defRPr sz="1500" b="1">
-                <a:solidFill>
-                  <a:srgbClr val="1E3A8A"/>
-                </a:solidFill>
-              </a:defRPr>
-            </a:pPr>
-            <a:r>
-              <a:t>⚙ Asynchronous REST Backend</a:t>
-            </a:r>
-          </a:p>
-          <a:p>
-            <a:pPr>
-              <a:defRPr sz="1300">
-                <a:solidFill>
-                  <a:srgbClr val="475569"/>
-                </a:solidFill>
-              </a:defRPr>
-            </a:pPr>
-            <a:r>
-              <a:t>FastAPI / Uvicorn ASGI Server / Pydantic V2 Type Safety</a:t>
-            </a:r>
-          </a:p>
-          <a:p>
-            <a:pPr>
-              <a:spcBef>
-                <a:spcPts val="800"/>
-              </a:spcBef>
-              <a:defRPr sz="1500" b="1">
-                <a:solidFill>
-                  <a:srgbClr val="1E3A8A"/>
-                </a:solidFill>
-              </a:defRPr>
-            </a:pPr>
-            <a:r>
-              <a:t>⚙ Data Persistence &amp; Storage</a:t>
-            </a:r>
-          </a:p>
-          <a:p>
-            <a:pPr>
-              <a:defRPr sz="1300">
-                <a:solidFill>
-                  <a:srgbClr val="475569"/>
-                </a:solidFill>
-              </a:defRPr>
-            </a:pPr>
-            <a:r>
-              <a:t>SQLite / PostgreSQL with transactional integrity &amp; audit trail</a:t>
-            </a:r>
-          </a:p>
-          <a:p>
-            <a:pPr>
-              <a:spcBef>
-                <a:spcPts val="800"/>
-              </a:spcBef>
-              <a:defRPr sz="1500" b="1">
-                <a:solidFill>
-                  <a:srgbClr val="1E3A8A"/>
-                </a:solidFill>
-              </a:defRPr>
-            </a:pPr>
-            <a:r>
-              <a:t>⚙ Interactive Frontend Layer</a:t>
-            </a:r>
-          </a:p>
-          <a:p>
-            <a:pPr>
-              <a:defRPr sz="1300">
-                <a:solidFill>
-                  <a:srgbClr val="475569"/>
-                </a:solidFill>
-              </a:defRPr>
-            </a:pPr>
-            <a:r>
-              <a:t>Modern Responsive Web Portal (HTML5, Tailwind/CSS, JavaScript ES6+)</a:t>
+              </a:spcAft>
+            </a:pPr>
+            <a:r>
+              <a:rPr b="1" sz="1300">
+                <a:solidFill>
+                  <a:srgbClr val="1E293B"/>
+                </a:solidFill>
+              </a:rPr>
+              <a:t>Command Center Capabilities</a:t>
+            </a:r>
+          </a:p>
+          <a:p>
+            <a:pPr>
+              <a:spcAft>
+                <a:spcPts val="500"/>
+              </a:spcAft>
+            </a:pPr>
+            <a:r>
+              <a:rPr sz="1050">
+                <a:solidFill>
+                  <a:srgbClr val="64748B"/>
+                </a:solidFill>
+              </a:rPr>
+              <a:t>• Executive KPI header displaying Total Inspected (6,000+), Critical Defects, and Average Confidence (94.8%).</a:t>
+            </a:r>
+          </a:p>
+          <a:p>
+            <a:pPr>
+              <a:spcAft>
+                <a:spcPts val="500"/>
+              </a:spcAft>
+            </a:pPr>
+            <a:r>
+              <a:rPr sz="1050">
+                <a:solidFill>
+                  <a:srgbClr val="64748B"/>
+                </a:solidFill>
+              </a:rPr>
+              <a:t>• Dedicated Port 5053 indicator and SOTA Transport architecture badge.</a:t>
+            </a:r>
+          </a:p>
+          <a:p>
+            <a:pPr>
+              <a:spcAft>
+                <a:spcPts val="500"/>
+              </a:spcAft>
+            </a:pPr>
+            <a:r>
+              <a:rPr sz="1050">
+                <a:solidFill>
+                  <a:srgbClr val="64748B"/>
+                </a:solidFill>
+              </a:rPr>
+              <a:t>• Interactive corridor preset selectors and condition injection controls.</a:t>
+            </a:r>
+          </a:p>
+          <a:p>
+            <a:pPr>
+              <a:spcAft>
+                <a:spcPts val="500"/>
+              </a:spcAft>
+            </a:pPr>
+            <a:r>
+              <a:rPr sz="1050">
+                <a:solidFill>
+                  <a:srgbClr val="64748B"/>
+                </a:solidFill>
+              </a:rPr>
+              <a:t>• Real-time dual model inference with instant risk scoring and speed restrictions.</a:t>
+            </a:r>
+          </a:p>
+          <a:p>
+            <a:pPr>
+              <a:spcAft>
+                <a:spcPts val="500"/>
+              </a:spcAft>
+            </a:pPr>
+            <a:r>
+              <a:rPr sz="1050">
+                <a:solidFill>
+                  <a:srgbClr val="64748B"/>
+                </a:solidFill>
+              </a:rPr>
+              <a:t>• Unified visualizer rendering dynamic defect markers and segmentation overlays.</a:t>
             </a:r>
           </a:p>
         </p:txBody>
@@ -4623,23 +7917,92 @@
       <p:grpSpPr/>
       <p:sp>
         <p:nvSpPr>
-          <p:cNvPr id="2" name="Rectangle 1"/>
+          <p:cNvPr id="2" name="TextBox 1"/>
+          <p:cNvSpPr txBox="1"/>
+          <p:nvPr/>
+        </p:nvSpPr>
+        <p:spPr>
+          <a:xfrm>
+            <a:off x="731520" y="365760"/>
+            <a:ext cx="10728655" cy="822960"/>
+          </a:xfrm>
+          <a:prstGeom prst="rect">
+            <a:avLst/>
+          </a:prstGeom>
+          <a:noFill/>
+        </p:spPr>
+        <p:txBody>
+          <a:bodyPr wrap="square" lIns="0" tIns="0" rIns="0" bIns="0">
+            <a:spAutoFit/>
+          </a:bodyPr>
+          <a:lstStyle/>
+          <a:p>
+            <a:r>
+              <a:rPr b="1" sz="1000">
+                <a:solidFill>
+                  <a:srgbClr val="EA580C"/>
+                </a:solidFill>
+              </a:rPr>
+              <a:t>CORRIDOR CASE STUDY • PROJECT-053</a:t>
+            </a:r>
+          </a:p>
+          <a:p>
+            <a:r>
+              <a:rPr b="1" sz="2000">
+                <a:solidFill>
+                  <a:srgbClr val="0F172A"/>
+                </a:solidFill>
+              </a:rPr>
+              <a:t>High-Speed Corridor: Nominal Condition Verification</a:t>
+            </a:r>
+          </a:p>
+        </p:txBody>
+      </p:sp>
+      <p:pic>
+        <p:nvPicPr>
+          <p:cNvPr id="3" name="Picture 2" descr="03_high_speed_corridor_nominal.png"/>
+          <p:cNvPicPr>
+            <a:picLocks noChangeAspect="1"/>
+          </p:cNvPicPr>
+          <p:nvPr/>
+        </p:nvPicPr>
+        <p:blipFill>
+          <a:blip r:embed="rId2"/>
+          <a:stretch>
+            <a:fillRect/>
+          </a:stretch>
+        </p:blipFill>
+        <p:spPr>
+          <a:xfrm>
+            <a:off x="731520" y="1371600"/>
+            <a:ext cx="6858000" cy="4846320"/>
+          </a:xfrm>
+          <a:prstGeom prst="rect">
+            <a:avLst/>
+          </a:prstGeom>
+        </p:spPr>
+      </p:pic>
+      <p:sp>
+        <p:nvSpPr>
+          <p:cNvPr id="4" name="Rectangle 3"/>
           <p:cNvSpPr/>
           <p:nvPr/>
         </p:nvSpPr>
         <p:spPr>
           <a:xfrm>
-            <a:off x="0" y="0"/>
-            <a:ext cx="12191695" cy="1097280"/>
+            <a:off x="7863840" y="1371600"/>
+            <a:ext cx="3566160" cy="4846320"/>
           </a:xfrm>
           <a:prstGeom prst="rect">
             <a:avLst/>
           </a:prstGeom>
           <a:solidFill>
-            <a:srgbClr val="0F172A"/>
+            <a:srgbClr val="FFFFFF"/>
           </a:solidFill>
-          <a:ln>
-            <a:noFill/>
+          <a:ln w="12700">
+            <a:solidFill>
+              <a:srgbClr val="E2E8F0"/>
+            </a:solidFill>
           </a:ln>
         </p:spPr>
         <p:style>
@@ -4666,14 +8029,14 @@
       </p:sp>
       <p:sp>
         <p:nvSpPr>
-          <p:cNvPr id="3" name="TextBox 2"/>
+          <p:cNvPr id="5" name="TextBox 4"/>
           <p:cNvSpPr txBox="1"/>
           <p:nvPr/>
         </p:nvSpPr>
         <p:spPr>
           <a:xfrm>
-            <a:off x="731520" y="137160"/>
-            <a:ext cx="10698480" cy="822960"/>
+            <a:off x="8046720" y="1554480"/>
+            <a:ext cx="3200400" cy="4480560"/>
           </a:xfrm>
           <a:prstGeom prst="rect">
             <a:avLst/>
@@ -4681,46 +8044,145 @@
           <a:noFill/>
         </p:spPr>
         <p:txBody>
-          <a:bodyPr wrap="square">
+          <a:bodyPr wrap="square" lIns="0" tIns="0" rIns="0" bIns="0">
             <a:spAutoFit/>
           </a:bodyPr>
           <a:lstStyle/>
           <a:p>
             <a:pPr>
-              <a:defRPr sz="2400" b="1">
-                <a:solidFill>
-                  <a:srgbClr val="FFFFFF"/>
-                </a:solidFill>
-              </a:defRPr>
-            </a:pPr>
-            <a:r>
-              <a:t>7. Conclusion &amp; Future Roadmap</a:t>
-            </a:r>
-          </a:p>
-          <a:p>
-            <a:pPr>
-              <a:defRPr sz="1100">
-                <a:solidFill>
-                  <a:srgbClr val="94A3B8"/>
-                </a:solidFill>
-              </a:defRPr>
-            </a:pPr>
-            <a:r>
-              <a:t>Academic &amp; Industrial AI Project Series  |  Project 53 of 55</a:t>
-            </a:r>
-          </a:p>
-        </p:txBody>
-      </p:sp>
-      <p:sp>
-        <p:nvSpPr>
-          <p:cNvPr id="4" name="TextBox 3"/>
+              <a:spcAft>
+                <a:spcPts val="800"/>
+              </a:spcAft>
+            </a:pPr>
+            <a:r>
+              <a:rPr b="1" sz="1300">
+                <a:solidFill>
+                  <a:srgbClr val="1E293B"/>
+                </a:solidFill>
+              </a:rPr>
+              <a:t>High-Speed Nominal Assessment</a:t>
+            </a:r>
+          </a:p>
+          <a:p>
+            <a:pPr>
+              <a:spcAft>
+                <a:spcPts val="500"/>
+              </a:spcAft>
+            </a:pPr>
+            <a:r>
+              <a:rPr sz="1050">
+                <a:solidFill>
+                  <a:srgbClr val="64748B"/>
+                </a:solidFill>
+              </a:rPr>
+              <a:t>• Chainage: KM 144.200 on Line 1 Main Westbound.</a:t>
+            </a:r>
+          </a:p>
+          <a:p>
+            <a:pPr>
+              <a:spcAft>
+                <a:spcPts val="500"/>
+              </a:spcAft>
+            </a:pPr>
+            <a:r>
+              <a:rPr sz="1050">
+                <a:solidFill>
+                  <a:srgbClr val="64748B"/>
+                </a:solidFill>
+              </a:rPr>
+              <a:t>• Defect Status: Clean Rail Head (No structural anomalies detected).</a:t>
+            </a:r>
+          </a:p>
+          <a:p>
+            <a:pPr>
+              <a:spcAft>
+                <a:spcPts val="500"/>
+              </a:spcAft>
+            </a:pPr>
+            <a:r>
+              <a:rPr sz="1050">
+                <a:solidFill>
+                  <a:srgbClr val="64748B"/>
+                </a:solidFill>
+              </a:rPr>
+              <a:t>• Model Confidence: 98.4% certainty of sound track condition.</a:t>
+            </a:r>
+          </a:p>
+          <a:p>
+            <a:pPr>
+              <a:spcAft>
+                <a:spcPts val="500"/>
+              </a:spcAft>
+            </a:pPr>
+            <a:r>
+              <a:rPr sz="1050">
+                <a:solidFill>
+                  <a:srgbClr val="64748B"/>
+                </a:solidFill>
+              </a:rPr>
+              <a:t>• Track Quality Index: 88.5 / 100 (Optimal operating condition).</a:t>
+            </a:r>
+          </a:p>
+          <a:p>
+            <a:pPr>
+              <a:spcAft>
+                <a:spcPts val="500"/>
+              </a:spcAft>
+            </a:pPr>
+            <a:r>
+              <a:rPr sz="1050">
+                <a:solidFill>
+                  <a:srgbClr val="64748B"/>
+                </a:solidFill>
+              </a:rPr>
+              <a:t>• Derailment Risk: 0.04 (Well within 0.20 safety threshold).</a:t>
+            </a:r>
+          </a:p>
+          <a:p>
+            <a:pPr>
+              <a:spcAft>
+                <a:spcPts val="500"/>
+              </a:spcAft>
+            </a:pPr>
+            <a:r>
+              <a:rPr sz="1050">
+                <a:solidFill>
+                  <a:srgbClr val="64748B"/>
+                </a:solidFill>
+              </a:rPr>
+              <a:t>• Recommended Action: Maintain 160.0 km/h line speed; proceed with standard cycle.</a:t>
+            </a:r>
+          </a:p>
+        </p:txBody>
+      </p:sp>
+    </p:spTree>
+  </p:cSld>
+  <p:clrMapOvr>
+    <a:masterClrMapping/>
+  </p:clrMapOvr>
+</p:sld>
+</file>
+
+<file path=ppt/slides/slide9.xml><?xml version="1.0" encoding="utf-8"?>
+<p:sld xmlns:a="http://schemas.openxmlformats.org/drawingml/2006/main" xmlns:p="http://schemas.openxmlformats.org/presentationml/2006/main" xmlns:r="http://schemas.openxmlformats.org/officeDocument/2006/relationships">
+  <p:cSld>
+    <p:spTree>
+      <p:nvGrpSpPr>
+        <p:cNvPr id="1" name=""/>
+        <p:cNvGrpSpPr/>
+        <p:nvPr/>
+      </p:nvGrpSpPr>
+      <p:grpSpPr/>
+      <p:sp>
+        <p:nvSpPr>
+          <p:cNvPr id="2" name="TextBox 1"/>
           <p:cNvSpPr txBox="1"/>
           <p:nvPr/>
         </p:nvSpPr>
         <p:spPr>
           <a:xfrm>
-            <a:off x="731520" y="1371600"/>
-            <a:ext cx="10698480" cy="5029200"/>
+            <a:off x="731520" y="365760"/>
+            <a:ext cx="10728655" cy="822960"/>
           </a:xfrm>
           <a:prstGeom prst="rect">
             <a:avLst/>
@@ -4728,89 +8190,225 @@
           <a:noFill/>
         </p:spPr>
         <p:txBody>
-          <a:bodyPr wrap="square">
+          <a:bodyPr wrap="square" lIns="0" tIns="0" rIns="0" bIns="0">
             <a:spAutoFit/>
           </a:bodyPr>
           <a:lstStyle/>
           <a:p>
-            <a:pPr>
-              <a:spcBef>
-                <a:spcPts val="1000"/>
-              </a:spcBef>
-              <a:defRPr sz="1500" b="1">
+            <a:r>
+              <a:rPr b="1" sz="1000">
+                <a:solidFill>
+                  <a:srgbClr val="EA580C"/>
+                </a:solidFill>
+              </a:rPr>
+              <a:t>DEFECT ANALYSIS • PROJECT-053</a:t>
+            </a:r>
+          </a:p>
+          <a:p>
+            <a:r>
+              <a:rPr b="1" sz="2000">
                 <a:solidFill>
                   <a:srgbClr val="0F172A"/>
                 </a:solidFill>
-              </a:defRPr>
-            </a:pPr>
-            <a:r>
-              <a:t>■ Project Accomplishments</a:t>
-            </a:r>
-          </a:p>
-          <a:p>
-            <a:pPr>
-              <a:defRPr sz="1300">
-                <a:solidFill>
-                  <a:srgbClr val="475569"/>
-                </a:solidFill>
-              </a:defRPr>
-            </a:pPr>
-            <a:r>
-              <a:t>Engineered a robust, end-to-end prototype validating the initial abstract with reproducible experiments.</a:t>
-            </a:r>
-          </a:p>
-          <a:p>
-            <a:pPr>
-              <a:spcBef>
-                <a:spcPts val="1000"/>
-              </a:spcBef>
-              <a:defRPr sz="1500" b="1">
-                <a:solidFill>
-                  <a:srgbClr val="0F172A"/>
-                </a:solidFill>
-              </a:defRPr>
-            </a:pPr>
-            <a:r>
-              <a:t>■ Industrial Significance</a:t>
-            </a:r>
-          </a:p>
-          <a:p>
-            <a:pPr>
-              <a:defRPr sz="1300">
-                <a:solidFill>
-                  <a:srgbClr val="475569"/>
-                </a:solidFill>
-              </a:defRPr>
-            </a:pPr>
-            <a:r>
-              <a:t>Eliminates latency and manual friction while ensuring high confidence automated decision support.</a:t>
-            </a:r>
-          </a:p>
-          <a:p>
-            <a:pPr>
-              <a:spcBef>
-                <a:spcPts val="1000"/>
-              </a:spcBef>
-              <a:defRPr sz="1500" b="1">
-                <a:solidFill>
-                  <a:srgbClr val="0F172A"/>
-                </a:solidFill>
-              </a:defRPr>
-            </a:pPr>
-            <a:r>
-              <a:t>■ Future Scope &amp; Extensions</a:t>
-            </a:r>
-          </a:p>
-          <a:p>
-            <a:pPr>
-              <a:defRPr sz="1300">
-                <a:solidFill>
-                  <a:srgbClr val="475569"/>
-                </a:solidFill>
-              </a:defRPr>
-            </a:pPr>
-            <a:r>
-              <a:t>Integration with federated edge sensors, distributed multi-tenant cloud clustering, and automated active learning.</a:t>
+              </a:rPr>
+              <a:t>Heavy Freight Corridor: Transverse Surface Crack</a:t>
+            </a:r>
+          </a:p>
+        </p:txBody>
+      </p:sp>
+      <p:pic>
+        <p:nvPicPr>
+          <p:cNvPr id="3" name="Picture 2" descr="04_freight_corridor_surface_crack.png"/>
+          <p:cNvPicPr>
+            <a:picLocks noChangeAspect="1"/>
+          </p:cNvPicPr>
+          <p:nvPr/>
+        </p:nvPicPr>
+        <p:blipFill>
+          <a:blip r:embed="rId2"/>
+          <a:stretch>
+            <a:fillRect/>
+          </a:stretch>
+        </p:blipFill>
+        <p:spPr>
+          <a:xfrm>
+            <a:off x="731520" y="1371600"/>
+            <a:ext cx="6858000" cy="4846320"/>
+          </a:xfrm>
+          <a:prstGeom prst="rect">
+            <a:avLst/>
+          </a:prstGeom>
+        </p:spPr>
+      </p:pic>
+      <p:sp>
+        <p:nvSpPr>
+          <p:cNvPr id="4" name="Rectangle 3"/>
+          <p:cNvSpPr/>
+          <p:nvPr/>
+        </p:nvSpPr>
+        <p:spPr>
+          <a:xfrm>
+            <a:off x="7863840" y="1371600"/>
+            <a:ext cx="3566160" cy="4846320"/>
+          </a:xfrm>
+          <a:prstGeom prst="rect">
+            <a:avLst/>
+          </a:prstGeom>
+          <a:solidFill>
+            <a:srgbClr val="FFFFFF"/>
+          </a:solidFill>
+          <a:ln w="12700">
+            <a:solidFill>
+              <a:srgbClr val="E2E8F0"/>
+            </a:solidFill>
+          </a:ln>
+        </p:spPr>
+        <p:style>
+          <a:lnRef idx="1">
+            <a:schemeClr val="accent1"/>
+          </a:lnRef>
+          <a:fillRef idx="3">
+            <a:schemeClr val="accent1"/>
+          </a:fillRef>
+          <a:effectRef idx="2">
+            <a:schemeClr val="accent1"/>
+          </a:effectRef>
+          <a:fontRef idx="minor">
+            <a:schemeClr val="lt1"/>
+          </a:fontRef>
+        </p:style>
+        <p:txBody>
+          <a:bodyPr rtlCol="0" anchor="ctr"/>
+          <a:lstStyle/>
+          <a:p>
+            <a:pPr algn="ctr"/>
+          </a:p>
+        </p:txBody>
+      </p:sp>
+      <p:sp>
+        <p:nvSpPr>
+          <p:cNvPr id="5" name="TextBox 4"/>
+          <p:cNvSpPr txBox="1"/>
+          <p:nvPr/>
+        </p:nvSpPr>
+        <p:spPr>
+          <a:xfrm>
+            <a:off x="8046720" y="1554480"/>
+            <a:ext cx="3200400" cy="4480560"/>
+          </a:xfrm>
+          <a:prstGeom prst="rect">
+            <a:avLst/>
+          </a:prstGeom>
+          <a:noFill/>
+        </p:spPr>
+        <p:txBody>
+          <a:bodyPr wrap="square" lIns="0" tIns="0" rIns="0" bIns="0">
+            <a:spAutoFit/>
+          </a:bodyPr>
+          <a:lstStyle/>
+          <a:p>
+            <a:pPr>
+              <a:spcAft>
+                <a:spcPts val="800"/>
+              </a:spcAft>
+            </a:pPr>
+            <a:r>
+              <a:rPr b="1" sz="1300">
+                <a:solidFill>
+                  <a:srgbClr val="1E293B"/>
+                </a:solidFill>
+              </a:rPr>
+              <a:t>Critical Crack Detection Alert</a:t>
+            </a:r>
+          </a:p>
+          <a:p>
+            <a:pPr>
+              <a:spcAft>
+                <a:spcPts val="500"/>
+              </a:spcAft>
+            </a:pPr>
+            <a:r>
+              <a:rPr sz="1050">
+                <a:solidFill>
+                  <a:srgbClr val="64748B"/>
+                </a:solidFill>
+              </a:rPr>
+              <a:t>• Chainage: KM 082.450 on Line 2 Freight Northbound.</a:t>
+            </a:r>
+          </a:p>
+          <a:p>
+            <a:pPr>
+              <a:spcAft>
+                <a:spcPts val="500"/>
+              </a:spcAft>
+            </a:pPr>
+            <a:r>
+              <a:rPr sz="1050">
+                <a:solidFill>
+                  <a:srgbClr val="64748B"/>
+                </a:solidFill>
+              </a:rPr>
+              <a:t>• Defect: Transverse Surface Crack (Rolling contact fatigue propagation).</a:t>
+            </a:r>
+          </a:p>
+          <a:p>
+            <a:pPr>
+              <a:spcAft>
+                <a:spcPts val="500"/>
+              </a:spcAft>
+            </a:pPr>
+            <a:r>
+              <a:rPr sz="1050">
+                <a:solidFill>
+                  <a:srgbClr val="64748B"/>
+                </a:solidFill>
+              </a:rPr>
+              <a:t>• Affected Mask Area: 1,620 px² segmented with high precision.</a:t>
+            </a:r>
+          </a:p>
+          <a:p>
+            <a:pPr>
+              <a:spcAft>
+                <a:spcPts val="500"/>
+              </a:spcAft>
+            </a:pPr>
+            <a:r>
+              <a:rPr sz="1050">
+                <a:solidFill>
+                  <a:srgbClr val="64748B"/>
+                </a:solidFill>
+              </a:rPr>
+              <a:t>• Derailment Risk: 0.82 (Exceeds critical emergency limit).</a:t>
+            </a:r>
+          </a:p>
+          <a:p>
+            <a:pPr>
+              <a:spcAft>
+                <a:spcPts val="500"/>
+              </a:spcAft>
+            </a:pPr>
+            <a:r>
+              <a:rPr sz="1050">
+                <a:solidFill>
+                  <a:srgbClr val="64748B"/>
+                </a:solidFill>
+              </a:rPr>
+              <a:t>• Immediate Action: Emergency speed restriction imposed (20.0 km/h).</a:t>
+            </a:r>
+          </a:p>
+          <a:p>
+            <a:pPr>
+              <a:spcAft>
+                <a:spcPts val="500"/>
+              </a:spcAft>
+            </a:pPr>
+            <a:r>
+              <a:rPr sz="1050">
+                <a:solidFill>
+                  <a:srgbClr val="64748B"/>
+                </a:solidFill>
+              </a:rPr>
+              <a:t>• Work Order: Dispatch ultrasonic rail weld gang for ultrasonic testing and grinding.</a:t>
             </a:r>
           </a:p>
         </p:txBody>
